--- a/public/fun/cards/care/care-10.pptx
+++ b/public/fun/cards/care/care-10.pptx
@@ -3085,7 +3085,7 @@
     <p:bg>
       <p:bgPr>
         <a:solidFill>
-          <a:srgbClr val="BA5917"/>
+          <a:srgbClr val="F3F4F6"/>
         </a:solidFill>
         <a:effectLst/>
       </p:bgPr>
@@ -3099,1110 +3099,14 @@
       <p:grpSpPr/>
       <p:sp>
         <p:nvSpPr>
-          <p:cNvPr id="2" name="Oval 1"/>
+          <p:cNvPr id="2" name="Freeform 1"/>
           <p:cNvSpPr/>
           <p:nvPr/>
         </p:nvSpPr>
         <p:spPr>
           <a:xfrm>
-            <a:off x="2462400" y="158400"/>
-            <a:ext cx="43200" cy="43200"/>
-          </a:xfrm>
-          <a:prstGeom prst="ellipse">
-            <a:avLst/>
-          </a:prstGeom>
-          <a:solidFill>
-            <a:srgbClr val="FADBC7">
-              <a:alpha val="70000"/>
-            </a:srgbClr>
-          </a:solidFill>
-          <a:ln>
-            <a:noFill/>
-          </a:ln>
-        </p:spPr>
-        <p:txBody>
-          <a:bodyPr rtlCol="0" anchor="ctr"/>
-          <a:lstStyle/>
-          <a:p>
-            <a:pPr algn="ctr"/>
-          </a:p>
-        </p:txBody>
-      </p:sp>
-      <p:sp>
-        <p:nvSpPr>
-          <p:cNvPr id="3" name="Oval 2"/>
-          <p:cNvSpPr/>
-          <p:nvPr/>
-        </p:nvSpPr>
-        <p:spPr>
-          <a:xfrm>
-            <a:off x="2462400" y="266400"/>
-            <a:ext cx="43200" cy="43200"/>
-          </a:xfrm>
-          <a:prstGeom prst="ellipse">
-            <a:avLst/>
-          </a:prstGeom>
-          <a:solidFill>
-            <a:srgbClr val="FADBC7">
-              <a:alpha val="57999"/>
-            </a:srgbClr>
-          </a:solidFill>
-          <a:ln>
-            <a:noFill/>
-          </a:ln>
-        </p:spPr>
-        <p:txBody>
-          <a:bodyPr rtlCol="0" anchor="ctr"/>
-          <a:lstStyle/>
-          <a:p>
-            <a:pPr algn="ctr"/>
-          </a:p>
-        </p:txBody>
-      </p:sp>
-      <p:sp>
-        <p:nvSpPr>
-          <p:cNvPr id="4" name="Oval 3"/>
-          <p:cNvSpPr/>
-          <p:nvPr/>
-        </p:nvSpPr>
-        <p:spPr>
-          <a:xfrm>
-            <a:off x="2462400" y="374400"/>
-            <a:ext cx="43200" cy="43200"/>
-          </a:xfrm>
-          <a:prstGeom prst="ellipse">
-            <a:avLst/>
-          </a:prstGeom>
-          <a:solidFill>
-            <a:srgbClr val="FADBC7">
-              <a:alpha val="46000"/>
-            </a:srgbClr>
-          </a:solidFill>
-          <a:ln>
-            <a:noFill/>
-          </a:ln>
-        </p:spPr>
-        <p:txBody>
-          <a:bodyPr rtlCol="0" anchor="ctr"/>
-          <a:lstStyle/>
-          <a:p>
-            <a:pPr algn="ctr"/>
-          </a:p>
-        </p:txBody>
-      </p:sp>
-      <p:sp>
-        <p:nvSpPr>
-          <p:cNvPr id="5" name="Oval 4"/>
-          <p:cNvSpPr/>
-          <p:nvPr/>
-        </p:nvSpPr>
-        <p:spPr>
-          <a:xfrm>
-            <a:off x="2462400" y="482400"/>
-            <a:ext cx="43200" cy="43200"/>
-          </a:xfrm>
-          <a:prstGeom prst="ellipse">
-            <a:avLst/>
-          </a:prstGeom>
-          <a:solidFill>
-            <a:srgbClr val="FADBC7">
-              <a:alpha val="34000"/>
-            </a:srgbClr>
-          </a:solidFill>
-          <a:ln>
-            <a:noFill/>
-          </a:ln>
-        </p:spPr>
-        <p:txBody>
-          <a:bodyPr rtlCol="0" anchor="ctr"/>
-          <a:lstStyle/>
-          <a:p>
-            <a:pPr algn="ctr"/>
-          </a:p>
-        </p:txBody>
-      </p:sp>
-      <p:sp>
-        <p:nvSpPr>
-          <p:cNvPr id="6" name="Oval 5"/>
-          <p:cNvSpPr/>
-          <p:nvPr/>
-        </p:nvSpPr>
-        <p:spPr>
-          <a:xfrm>
-            <a:off x="2570400" y="158400"/>
-            <a:ext cx="43200" cy="43200"/>
-          </a:xfrm>
-          <a:prstGeom prst="ellipse">
-            <a:avLst/>
-          </a:prstGeom>
-          <a:solidFill>
-            <a:srgbClr val="FADBC7">
-              <a:alpha val="70000"/>
-            </a:srgbClr>
-          </a:solidFill>
-          <a:ln>
-            <a:noFill/>
-          </a:ln>
-        </p:spPr>
-        <p:txBody>
-          <a:bodyPr rtlCol="0" anchor="ctr"/>
-          <a:lstStyle/>
-          <a:p>
-            <a:pPr algn="ctr"/>
-          </a:p>
-        </p:txBody>
-      </p:sp>
-      <p:sp>
-        <p:nvSpPr>
-          <p:cNvPr id="7" name="Oval 6"/>
-          <p:cNvSpPr/>
-          <p:nvPr/>
-        </p:nvSpPr>
-        <p:spPr>
-          <a:xfrm>
-            <a:off x="2570400" y="266400"/>
-            <a:ext cx="43200" cy="43200"/>
-          </a:xfrm>
-          <a:prstGeom prst="ellipse">
-            <a:avLst/>
-          </a:prstGeom>
-          <a:solidFill>
-            <a:srgbClr val="FADBC7">
-              <a:alpha val="57999"/>
-            </a:srgbClr>
-          </a:solidFill>
-          <a:ln>
-            <a:noFill/>
-          </a:ln>
-        </p:spPr>
-        <p:txBody>
-          <a:bodyPr rtlCol="0" anchor="ctr"/>
-          <a:lstStyle/>
-          <a:p>
-            <a:pPr algn="ctr"/>
-          </a:p>
-        </p:txBody>
-      </p:sp>
-      <p:sp>
-        <p:nvSpPr>
-          <p:cNvPr id="8" name="Oval 7"/>
-          <p:cNvSpPr/>
-          <p:nvPr/>
-        </p:nvSpPr>
-        <p:spPr>
-          <a:xfrm>
-            <a:off x="2570400" y="374400"/>
-            <a:ext cx="43200" cy="43200"/>
-          </a:xfrm>
-          <a:prstGeom prst="ellipse">
-            <a:avLst/>
-          </a:prstGeom>
-          <a:solidFill>
-            <a:srgbClr val="FADBC7">
-              <a:alpha val="46000"/>
-            </a:srgbClr>
-          </a:solidFill>
-          <a:ln>
-            <a:noFill/>
-          </a:ln>
-        </p:spPr>
-        <p:txBody>
-          <a:bodyPr rtlCol="0" anchor="ctr"/>
-          <a:lstStyle/>
-          <a:p>
-            <a:pPr algn="ctr"/>
-          </a:p>
-        </p:txBody>
-      </p:sp>
-      <p:sp>
-        <p:nvSpPr>
-          <p:cNvPr id="9" name="Oval 8"/>
-          <p:cNvSpPr/>
-          <p:nvPr/>
-        </p:nvSpPr>
-        <p:spPr>
-          <a:xfrm>
-            <a:off x="2570400" y="482400"/>
-            <a:ext cx="43200" cy="43200"/>
-          </a:xfrm>
-          <a:prstGeom prst="ellipse">
-            <a:avLst/>
-          </a:prstGeom>
-          <a:solidFill>
-            <a:srgbClr val="FADBC7">
-              <a:alpha val="34000"/>
-            </a:srgbClr>
-          </a:solidFill>
-          <a:ln>
-            <a:noFill/>
-          </a:ln>
-        </p:spPr>
-        <p:txBody>
-          <a:bodyPr rtlCol="0" anchor="ctr"/>
-          <a:lstStyle/>
-          <a:p>
-            <a:pPr algn="ctr"/>
-          </a:p>
-        </p:txBody>
-      </p:sp>
-      <p:sp>
-        <p:nvSpPr>
-          <p:cNvPr id="10" name="Oval 9"/>
-          <p:cNvSpPr/>
-          <p:nvPr/>
-        </p:nvSpPr>
-        <p:spPr>
-          <a:xfrm>
-            <a:off x="2678400" y="158400"/>
-            <a:ext cx="43200" cy="43200"/>
-          </a:xfrm>
-          <a:prstGeom prst="ellipse">
-            <a:avLst/>
-          </a:prstGeom>
-          <a:solidFill>
-            <a:srgbClr val="FADBC7">
-              <a:alpha val="70000"/>
-            </a:srgbClr>
-          </a:solidFill>
-          <a:ln>
-            <a:noFill/>
-          </a:ln>
-        </p:spPr>
-        <p:txBody>
-          <a:bodyPr rtlCol="0" anchor="ctr"/>
-          <a:lstStyle/>
-          <a:p>
-            <a:pPr algn="ctr"/>
-          </a:p>
-        </p:txBody>
-      </p:sp>
-      <p:sp>
-        <p:nvSpPr>
-          <p:cNvPr id="11" name="Oval 10"/>
-          <p:cNvSpPr/>
-          <p:nvPr/>
-        </p:nvSpPr>
-        <p:spPr>
-          <a:xfrm>
-            <a:off x="2678400" y="266400"/>
-            <a:ext cx="43200" cy="43200"/>
-          </a:xfrm>
-          <a:prstGeom prst="ellipse">
-            <a:avLst/>
-          </a:prstGeom>
-          <a:solidFill>
-            <a:srgbClr val="FADBC7">
-              <a:alpha val="57999"/>
-            </a:srgbClr>
-          </a:solidFill>
-          <a:ln>
-            <a:noFill/>
-          </a:ln>
-        </p:spPr>
-        <p:txBody>
-          <a:bodyPr rtlCol="0" anchor="ctr"/>
-          <a:lstStyle/>
-          <a:p>
-            <a:pPr algn="ctr"/>
-          </a:p>
-        </p:txBody>
-      </p:sp>
-      <p:sp>
-        <p:nvSpPr>
-          <p:cNvPr id="12" name="Oval 11"/>
-          <p:cNvSpPr/>
-          <p:nvPr/>
-        </p:nvSpPr>
-        <p:spPr>
-          <a:xfrm>
-            <a:off x="2678400" y="374400"/>
-            <a:ext cx="43200" cy="43200"/>
-          </a:xfrm>
-          <a:prstGeom prst="ellipse">
-            <a:avLst/>
-          </a:prstGeom>
-          <a:solidFill>
-            <a:srgbClr val="FADBC7">
-              <a:alpha val="46000"/>
-            </a:srgbClr>
-          </a:solidFill>
-          <a:ln>
-            <a:noFill/>
-          </a:ln>
-        </p:spPr>
-        <p:txBody>
-          <a:bodyPr rtlCol="0" anchor="ctr"/>
-          <a:lstStyle/>
-          <a:p>
-            <a:pPr algn="ctr"/>
-          </a:p>
-        </p:txBody>
-      </p:sp>
-      <p:sp>
-        <p:nvSpPr>
-          <p:cNvPr id="13" name="Oval 12"/>
-          <p:cNvSpPr/>
-          <p:nvPr/>
-        </p:nvSpPr>
-        <p:spPr>
-          <a:xfrm>
-            <a:off x="2678400" y="482400"/>
-            <a:ext cx="43200" cy="43200"/>
-          </a:xfrm>
-          <a:prstGeom prst="ellipse">
-            <a:avLst/>
-          </a:prstGeom>
-          <a:solidFill>
-            <a:srgbClr val="FADBC7">
-              <a:alpha val="34000"/>
-            </a:srgbClr>
-          </a:solidFill>
-          <a:ln>
-            <a:noFill/>
-          </a:ln>
-        </p:spPr>
-        <p:txBody>
-          <a:bodyPr rtlCol="0" anchor="ctr"/>
-          <a:lstStyle/>
-          <a:p>
-            <a:pPr algn="ctr"/>
-          </a:p>
-        </p:txBody>
-      </p:sp>
-      <p:sp>
-        <p:nvSpPr>
-          <p:cNvPr id="14" name="Oval 13"/>
-          <p:cNvSpPr/>
-          <p:nvPr/>
-        </p:nvSpPr>
-        <p:spPr>
-          <a:xfrm>
-            <a:off x="2786400" y="158400"/>
-            <a:ext cx="43200" cy="43200"/>
-          </a:xfrm>
-          <a:prstGeom prst="ellipse">
-            <a:avLst/>
-          </a:prstGeom>
-          <a:solidFill>
-            <a:srgbClr val="FADBC7">
-              <a:alpha val="70000"/>
-            </a:srgbClr>
-          </a:solidFill>
-          <a:ln>
-            <a:noFill/>
-          </a:ln>
-        </p:spPr>
-        <p:txBody>
-          <a:bodyPr rtlCol="0" anchor="ctr"/>
-          <a:lstStyle/>
-          <a:p>
-            <a:pPr algn="ctr"/>
-          </a:p>
-        </p:txBody>
-      </p:sp>
-      <p:sp>
-        <p:nvSpPr>
-          <p:cNvPr id="15" name="Oval 14"/>
-          <p:cNvSpPr/>
-          <p:nvPr/>
-        </p:nvSpPr>
-        <p:spPr>
-          <a:xfrm>
-            <a:off x="2786400" y="266400"/>
-            <a:ext cx="43200" cy="43200"/>
-          </a:xfrm>
-          <a:prstGeom prst="ellipse">
-            <a:avLst/>
-          </a:prstGeom>
-          <a:solidFill>
-            <a:srgbClr val="FADBC7">
-              <a:alpha val="57999"/>
-            </a:srgbClr>
-          </a:solidFill>
-          <a:ln>
-            <a:noFill/>
-          </a:ln>
-        </p:spPr>
-        <p:txBody>
-          <a:bodyPr rtlCol="0" anchor="ctr"/>
-          <a:lstStyle/>
-          <a:p>
-            <a:pPr algn="ctr"/>
-          </a:p>
-        </p:txBody>
-      </p:sp>
-      <p:sp>
-        <p:nvSpPr>
-          <p:cNvPr id="16" name="Oval 15"/>
-          <p:cNvSpPr/>
-          <p:nvPr/>
-        </p:nvSpPr>
-        <p:spPr>
-          <a:xfrm>
-            <a:off x="2786400" y="374400"/>
-            <a:ext cx="43200" cy="43200"/>
-          </a:xfrm>
-          <a:prstGeom prst="ellipse">
-            <a:avLst/>
-          </a:prstGeom>
-          <a:solidFill>
-            <a:srgbClr val="FADBC7">
-              <a:alpha val="46000"/>
-            </a:srgbClr>
-          </a:solidFill>
-          <a:ln>
-            <a:noFill/>
-          </a:ln>
-        </p:spPr>
-        <p:txBody>
-          <a:bodyPr rtlCol="0" anchor="ctr"/>
-          <a:lstStyle/>
-          <a:p>
-            <a:pPr algn="ctr"/>
-          </a:p>
-        </p:txBody>
-      </p:sp>
-      <p:sp>
-        <p:nvSpPr>
-          <p:cNvPr id="17" name="Oval 16"/>
-          <p:cNvSpPr/>
-          <p:nvPr/>
-        </p:nvSpPr>
-        <p:spPr>
-          <a:xfrm>
-            <a:off x="2786400" y="482400"/>
-            <a:ext cx="43200" cy="43200"/>
-          </a:xfrm>
-          <a:prstGeom prst="ellipse">
-            <a:avLst/>
-          </a:prstGeom>
-          <a:solidFill>
-            <a:srgbClr val="FADBC7">
-              <a:alpha val="34000"/>
-            </a:srgbClr>
-          </a:solidFill>
-          <a:ln>
-            <a:noFill/>
-          </a:ln>
-        </p:spPr>
-        <p:txBody>
-          <a:bodyPr rtlCol="0" anchor="ctr"/>
-          <a:lstStyle/>
-          <a:p>
-            <a:pPr algn="ctr"/>
-          </a:p>
-        </p:txBody>
-      </p:sp>
-      <p:sp>
-        <p:nvSpPr>
-          <p:cNvPr id="18" name="Oval 17"/>
-          <p:cNvSpPr/>
-          <p:nvPr/>
-        </p:nvSpPr>
-        <p:spPr>
-          <a:xfrm>
-            <a:off x="2894400" y="158400"/>
-            <a:ext cx="43200" cy="43200"/>
-          </a:xfrm>
-          <a:prstGeom prst="ellipse">
-            <a:avLst/>
-          </a:prstGeom>
-          <a:solidFill>
-            <a:srgbClr val="FADBC7">
-              <a:alpha val="70000"/>
-            </a:srgbClr>
-          </a:solidFill>
-          <a:ln>
-            <a:noFill/>
-          </a:ln>
-        </p:spPr>
-        <p:txBody>
-          <a:bodyPr rtlCol="0" anchor="ctr"/>
-          <a:lstStyle/>
-          <a:p>
-            <a:pPr algn="ctr"/>
-          </a:p>
-        </p:txBody>
-      </p:sp>
-      <p:sp>
-        <p:nvSpPr>
-          <p:cNvPr id="19" name="Oval 18"/>
-          <p:cNvSpPr/>
-          <p:nvPr/>
-        </p:nvSpPr>
-        <p:spPr>
-          <a:xfrm>
-            <a:off x="2894400" y="266400"/>
-            <a:ext cx="43200" cy="43200"/>
-          </a:xfrm>
-          <a:prstGeom prst="ellipse">
-            <a:avLst/>
-          </a:prstGeom>
-          <a:solidFill>
-            <a:srgbClr val="FADBC7">
-              <a:alpha val="57999"/>
-            </a:srgbClr>
-          </a:solidFill>
-          <a:ln>
-            <a:noFill/>
-          </a:ln>
-        </p:spPr>
-        <p:txBody>
-          <a:bodyPr rtlCol="0" anchor="ctr"/>
-          <a:lstStyle/>
-          <a:p>
-            <a:pPr algn="ctr"/>
-          </a:p>
-        </p:txBody>
-      </p:sp>
-      <p:sp>
-        <p:nvSpPr>
-          <p:cNvPr id="20" name="Oval 19"/>
-          <p:cNvSpPr/>
-          <p:nvPr/>
-        </p:nvSpPr>
-        <p:spPr>
-          <a:xfrm>
-            <a:off x="2894400" y="374400"/>
-            <a:ext cx="43200" cy="43200"/>
-          </a:xfrm>
-          <a:prstGeom prst="ellipse">
-            <a:avLst/>
-          </a:prstGeom>
-          <a:solidFill>
-            <a:srgbClr val="FADBC7">
-              <a:alpha val="46000"/>
-            </a:srgbClr>
-          </a:solidFill>
-          <a:ln>
-            <a:noFill/>
-          </a:ln>
-        </p:spPr>
-        <p:txBody>
-          <a:bodyPr rtlCol="0" anchor="ctr"/>
-          <a:lstStyle/>
-          <a:p>
-            <a:pPr algn="ctr"/>
-          </a:p>
-        </p:txBody>
-      </p:sp>
-      <p:sp>
-        <p:nvSpPr>
-          <p:cNvPr id="21" name="Oval 20"/>
-          <p:cNvSpPr/>
-          <p:nvPr/>
-        </p:nvSpPr>
-        <p:spPr>
-          <a:xfrm>
-            <a:off x="2894400" y="482400"/>
-            <a:ext cx="43200" cy="43200"/>
-          </a:xfrm>
-          <a:prstGeom prst="ellipse">
-            <a:avLst/>
-          </a:prstGeom>
-          <a:solidFill>
-            <a:srgbClr val="FADBC7">
-              <a:alpha val="34000"/>
-            </a:srgbClr>
-          </a:solidFill>
-          <a:ln>
-            <a:noFill/>
-          </a:ln>
-        </p:spPr>
-        <p:txBody>
-          <a:bodyPr rtlCol="0" anchor="ctr"/>
-          <a:lstStyle/>
-          <a:p>
-            <a:pPr algn="ctr"/>
-          </a:p>
-        </p:txBody>
-      </p:sp>
-      <p:sp>
-        <p:nvSpPr>
-          <p:cNvPr id="22" name="Rectangle 21"/>
-          <p:cNvSpPr/>
-          <p:nvPr/>
-        </p:nvSpPr>
-        <p:spPr>
-          <a:xfrm>
-            <a:off x="0" y="1663200"/>
-            <a:ext cx="3240000" cy="136800"/>
-          </a:xfrm>
-          <a:prstGeom prst="rect">
-            <a:avLst/>
-          </a:prstGeom>
-          <a:solidFill>
-            <a:srgbClr val="FADBC7"/>
-          </a:solidFill>
-          <a:ln>
-            <a:noFill/>
-          </a:ln>
-        </p:spPr>
-        <p:txBody>
-          <a:bodyPr rtlCol="0" anchor="ctr"/>
-          <a:lstStyle/>
-          <a:p>
-            <a:pPr algn="ctr"/>
-          </a:p>
-        </p:txBody>
-      </p:sp>
-      <p:sp>
-        <p:nvSpPr>
-          <p:cNvPr id="23" name="Rectangle 22"/>
-          <p:cNvSpPr/>
-          <p:nvPr/>
-        </p:nvSpPr>
-        <p:spPr>
-          <a:xfrm>
-            <a:off x="0" y="1663200"/>
-            <a:ext cx="936000" cy="136800"/>
-          </a:xfrm>
-          <a:prstGeom prst="rect">
-            <a:avLst/>
-          </a:prstGeom>
-          <a:solidFill>
-            <a:srgbClr val="C5743C"/>
-          </a:solidFill>
-          <a:ln>
-            <a:noFill/>
-          </a:ln>
-        </p:spPr>
-        <p:txBody>
-          <a:bodyPr rtlCol="0" anchor="ctr"/>
-          <a:lstStyle/>
-          <a:p>
-            <a:pPr algn="ctr"/>
-          </a:p>
-        </p:txBody>
-      </p:sp>
-      <p:sp>
-        <p:nvSpPr>
-          <p:cNvPr id="24" name="텍스트"/>
-          <p:cNvSpPr txBox="1"/>
-          <p:nvPr/>
-        </p:nvSpPr>
-        <p:spPr>
-          <a:xfrm>
-            <a:off x="252000" y="208800"/>
-            <a:ext cx="1800000" cy="100800"/>
-          </a:xfrm>
-          <a:prstGeom prst="rect">
-            <a:avLst/>
-          </a:prstGeom>
-          <a:noFill/>
-        </p:spPr>
-        <p:txBody>
-          <a:bodyPr wrap="square" lIns="0" rIns="0" tIns="0" bIns="0" anchor="t">
-            <a:spAutoFit/>
-          </a:bodyPr>
-          <a:lstStyle/>
-          <a:p>
-            <a:pPr algn="l">
-              <a:lnSpc>
-                <a:spcPts val="1087"/>
-              </a:lnSpc>
-            </a:pPr>
-            <a:r>
-              <a:rPr sz="750" b="1" spc="150">
-                <a:solidFill>
-                  <a:srgbClr val="FEFCFB"/>
-                </a:solidFill>
-                <a:latin typeface="맑은 고딕"/>
-                <a:ea typeface="맑은 고딕"/>
-              </a:rPr>
-              <a:t>의원 · 약국 이름</a:t>
-            </a:r>
-          </a:p>
-        </p:txBody>
-      </p:sp>
-      <p:sp>
-        <p:nvSpPr>
-          <p:cNvPr id="25" name="텍스트"/>
-          <p:cNvSpPr txBox="1"/>
-          <p:nvPr/>
-        </p:nvSpPr>
-        <p:spPr>
-          <a:xfrm>
-            <a:off x="252000" y="540000"/>
-            <a:ext cx="2016000" cy="313692"/>
-          </a:xfrm>
-          <a:prstGeom prst="rect">
-            <a:avLst/>
-          </a:prstGeom>
-          <a:noFill/>
-        </p:spPr>
-        <p:txBody>
-          <a:bodyPr wrap="square" lIns="0" rIns="0" tIns="0" bIns="0" anchor="t">
-            <a:spAutoFit/>
-          </a:bodyPr>
-          <a:lstStyle/>
-          <a:p>
-            <a:pPr algn="l">
-              <a:lnSpc>
-                <a:spcPts val="2755"/>
-              </a:lnSpc>
-            </a:pPr>
-            <a:r>
-              <a:rPr sz="1900" b="1" spc="50">
-                <a:solidFill>
-                  <a:srgbClr val="FFFFFF"/>
-                </a:solidFill>
-                <a:latin typeface="바탕"/>
-                <a:ea typeface="바탕"/>
-              </a:rPr>
-              <a:t>임건우</a:t>
-            </a:r>
-          </a:p>
-        </p:txBody>
-      </p:sp>
-      <p:sp>
-        <p:nvSpPr>
-          <p:cNvPr id="26" name="텍스트"/>
-          <p:cNvSpPr txBox="1"/>
-          <p:nvPr/>
-        </p:nvSpPr>
-        <p:spPr>
-          <a:xfrm>
-            <a:off x="252000" y="828000"/>
-            <a:ext cx="2016000" cy="122400"/>
-          </a:xfrm>
-          <a:prstGeom prst="rect">
-            <a:avLst/>
-          </a:prstGeom>
-          <a:noFill/>
-        </p:spPr>
-        <p:txBody>
-          <a:bodyPr wrap="square" lIns="0" rIns="0" tIns="0" bIns="0" anchor="t">
-            <a:spAutoFit/>
-          </a:bodyPr>
-          <a:lstStyle/>
-          <a:p>
-            <a:pPr algn="l">
-              <a:lnSpc>
-                <a:spcPts val="1232"/>
-              </a:lnSpc>
-            </a:pPr>
-            <a:r>
-              <a:rPr sz="850" b="1">
-                <a:solidFill>
-                  <a:srgbClr val="FFFDFC"/>
-                </a:solidFill>
-                <a:latin typeface="맑은 고딕"/>
-                <a:ea typeface="맑은 고딕"/>
-              </a:rPr>
-              <a:t>영양사</a:t>
-            </a:r>
-          </a:p>
-        </p:txBody>
-      </p:sp>
-      <p:sp>
-        <p:nvSpPr>
-          <p:cNvPr id="27" name="텍스트"/>
-          <p:cNvSpPr txBox="1"/>
-          <p:nvPr/>
-        </p:nvSpPr>
-        <p:spPr>
-          <a:xfrm>
-            <a:off x="252000" y="1108800"/>
-            <a:ext cx="122400" cy="168911"/>
-          </a:xfrm>
-          <a:prstGeom prst="rect">
-            <a:avLst/>
-          </a:prstGeom>
-          <a:noFill/>
-        </p:spPr>
-        <p:txBody>
-          <a:bodyPr wrap="square" lIns="0" rIns="0" tIns="0" bIns="0" anchor="t">
-            <a:spAutoFit/>
-          </a:bodyPr>
-          <a:lstStyle/>
-          <a:p>
-            <a:pPr algn="l">
-              <a:lnSpc>
-                <a:spcPts val="1015"/>
-              </a:lnSpc>
-            </a:pPr>
-            <a:r>
-              <a:rPr sz="700" b="1">
-                <a:solidFill>
-                  <a:srgbClr val="FFFDFC"/>
-                </a:solidFill>
-                <a:latin typeface="맑은 고딕"/>
-                <a:ea typeface="맑은 고딕"/>
-              </a:rPr>
-              <a:t>T</a:t>
-            </a:r>
-          </a:p>
-        </p:txBody>
-      </p:sp>
-      <p:sp>
-        <p:nvSpPr>
-          <p:cNvPr id="28" name="텍스트"/>
-          <p:cNvSpPr txBox="1"/>
-          <p:nvPr/>
-        </p:nvSpPr>
-        <p:spPr>
-          <a:xfrm>
-            <a:off x="396000" y="1108800"/>
-            <a:ext cx="1584000" cy="168911"/>
-          </a:xfrm>
-          <a:prstGeom prst="rect">
-            <a:avLst/>
-          </a:prstGeom>
-          <a:noFill/>
-        </p:spPr>
-        <p:txBody>
-          <a:bodyPr wrap="square" lIns="0" rIns="0" tIns="0" bIns="0" anchor="t">
-            <a:spAutoFit/>
-          </a:bodyPr>
-          <a:lstStyle/>
-          <a:p>
-            <a:pPr algn="l">
-              <a:lnSpc>
-                <a:spcPts val="1015"/>
-              </a:lnSpc>
-            </a:pPr>
-            <a:r>
-              <a:rPr sz="700" b="0">
-                <a:solidFill>
-                  <a:srgbClr val="FFFFFF"/>
-                </a:solidFill>
-                <a:latin typeface="맑은 고딕"/>
-                <a:ea typeface="맑은 고딕"/>
-              </a:rPr>
-              <a:t>010-1234-5678</a:t>
-            </a:r>
-          </a:p>
-        </p:txBody>
-      </p:sp>
-      <p:sp>
-        <p:nvSpPr>
-          <p:cNvPr id="29" name="텍스트"/>
-          <p:cNvSpPr txBox="1"/>
-          <p:nvPr/>
-        </p:nvSpPr>
-        <p:spPr>
-          <a:xfrm>
-            <a:off x="252000" y="1277711"/>
-            <a:ext cx="122400" cy="168911"/>
-          </a:xfrm>
-          <a:prstGeom prst="rect">
-            <a:avLst/>
-          </a:prstGeom>
-          <a:noFill/>
-        </p:spPr>
-        <p:txBody>
-          <a:bodyPr wrap="square" lIns="0" rIns="0" tIns="0" bIns="0" anchor="t">
-            <a:spAutoFit/>
-          </a:bodyPr>
-          <a:lstStyle/>
-          <a:p>
-            <a:pPr algn="l">
-              <a:lnSpc>
-                <a:spcPts val="1015"/>
-              </a:lnSpc>
-            </a:pPr>
-            <a:r>
-              <a:rPr sz="700" b="1">
-                <a:solidFill>
-                  <a:srgbClr val="FFFDFC"/>
-                </a:solidFill>
-                <a:latin typeface="맑은 고딕"/>
-                <a:ea typeface="맑은 고딕"/>
-              </a:rPr>
-              <a:t>E</a:t>
-            </a:r>
-          </a:p>
-        </p:txBody>
-      </p:sp>
-      <p:sp>
-        <p:nvSpPr>
-          <p:cNvPr id="30" name="텍스트"/>
-          <p:cNvSpPr txBox="1"/>
-          <p:nvPr/>
-        </p:nvSpPr>
-        <p:spPr>
-          <a:xfrm>
-            <a:off x="396000" y="1277711"/>
-            <a:ext cx="1584000" cy="168911"/>
-          </a:xfrm>
-          <a:prstGeom prst="rect">
-            <a:avLst/>
-          </a:prstGeom>
-          <a:noFill/>
-        </p:spPr>
-        <p:txBody>
-          <a:bodyPr wrap="square" lIns="0" rIns="0" tIns="0" bIns="0" anchor="t">
-            <a:spAutoFit/>
-          </a:bodyPr>
-          <a:lstStyle/>
-          <a:p>
-            <a:pPr algn="l">
-              <a:lnSpc>
-                <a:spcPts val="1015"/>
-              </a:lnSpc>
-            </a:pPr>
-            <a:r>
-              <a:rPr sz="700" b="0">
-                <a:solidFill>
-                  <a:srgbClr val="FFFFFF"/>
-                </a:solidFill>
-                <a:latin typeface="맑은 고딕"/>
-                <a:ea typeface="맑은 고딕"/>
-              </a:rPr>
-              <a:t>name@example.com</a:t>
-            </a:r>
-          </a:p>
-        </p:txBody>
-      </p:sp>
-      <p:sp>
-        <p:nvSpPr>
-          <p:cNvPr id="31" name="텍스트"/>
-          <p:cNvSpPr txBox="1"/>
-          <p:nvPr/>
-        </p:nvSpPr>
-        <p:spPr>
-          <a:xfrm>
-            <a:off x="252000" y="1446622"/>
-            <a:ext cx="122400" cy="168911"/>
-          </a:xfrm>
-          <a:prstGeom prst="rect">
-            <a:avLst/>
-          </a:prstGeom>
-          <a:noFill/>
-        </p:spPr>
-        <p:txBody>
-          <a:bodyPr wrap="square" lIns="0" rIns="0" tIns="0" bIns="0" anchor="t">
-            <a:spAutoFit/>
-          </a:bodyPr>
-          <a:lstStyle/>
-          <a:p>
-            <a:pPr algn="l">
-              <a:lnSpc>
-                <a:spcPts val="1015"/>
-              </a:lnSpc>
-            </a:pPr>
-            <a:r>
-              <a:rPr sz="700" b="1">
-                <a:solidFill>
-                  <a:srgbClr val="FFFDFC"/>
-                </a:solidFill>
-                <a:latin typeface="맑은 고딕"/>
-                <a:ea typeface="맑은 고딕"/>
-              </a:rPr>
-              <a:t>A</a:t>
-            </a:r>
-          </a:p>
-        </p:txBody>
-      </p:sp>
-      <p:sp>
-        <p:nvSpPr>
-          <p:cNvPr id="32" name="텍스트"/>
-          <p:cNvSpPr txBox="1"/>
-          <p:nvPr/>
-        </p:nvSpPr>
-        <p:spPr>
-          <a:xfrm>
-            <a:off x="396000" y="1446622"/>
-            <a:ext cx="1584000" cy="168911"/>
-          </a:xfrm>
-          <a:prstGeom prst="rect">
-            <a:avLst/>
-          </a:prstGeom>
-          <a:noFill/>
-        </p:spPr>
-        <p:txBody>
-          <a:bodyPr wrap="square" lIns="0" rIns="0" tIns="0" bIns="0" anchor="t">
-            <a:spAutoFit/>
-          </a:bodyPr>
-          <a:lstStyle/>
-          <a:p>
-            <a:pPr algn="l">
-              <a:lnSpc>
-                <a:spcPts val="1015"/>
-              </a:lnSpc>
-            </a:pPr>
-            <a:r>
-              <a:rPr sz="700" b="0">
-                <a:solidFill>
-                  <a:srgbClr val="FFFFFF"/>
-                </a:solidFill>
-                <a:latin typeface="맑은 고딕"/>
-                <a:ea typeface="맑은 고딕"/>
-              </a:rPr>
-              <a:t>주소를 입력해 주세요</a:t>
-            </a:r>
-          </a:p>
-        </p:txBody>
-      </p:sp>
-      <p:sp>
-        <p:nvSpPr>
-          <p:cNvPr id="33" name="Oval 32"/>
-          <p:cNvSpPr/>
-          <p:nvPr/>
-        </p:nvSpPr>
-        <p:spPr>
-          <a:xfrm>
-            <a:off x="2782080" y="1104480"/>
-            <a:ext cx="109440" cy="109440"/>
-          </a:xfrm>
-          <a:prstGeom prst="ellipse">
-            <a:avLst/>
-          </a:prstGeom>
-          <a:solidFill>
-            <a:srgbClr val="FADBC7"/>
-          </a:solidFill>
-          <a:ln>
-            <a:noFill/>
-          </a:ln>
-        </p:spPr>
-        <p:txBody>
-          <a:bodyPr rtlCol="0" anchor="ctr"/>
-          <a:lstStyle/>
-          <a:p>
-            <a:pPr algn="ctr"/>
-          </a:p>
-        </p:txBody>
-      </p:sp>
-      <p:sp>
-        <p:nvSpPr>
-          <p:cNvPr id="34" name="Oval 33"/>
-          <p:cNvSpPr/>
-          <p:nvPr/>
-        </p:nvSpPr>
-        <p:spPr>
-          <a:xfrm>
-            <a:off x="2868480" y="1104480"/>
-            <a:ext cx="109440" cy="109440"/>
-          </a:xfrm>
-          <a:prstGeom prst="ellipse">
-            <a:avLst/>
-          </a:prstGeom>
-          <a:solidFill>
-            <a:srgbClr val="FADBC7"/>
-          </a:solidFill>
-          <a:ln>
-            <a:noFill/>
-          </a:ln>
-        </p:spPr>
-        <p:txBody>
-          <a:bodyPr rtlCol="0" anchor="ctr"/>
-          <a:lstStyle/>
-          <a:p>
-            <a:pPr algn="ctr"/>
-          </a:p>
-        </p:txBody>
-      </p:sp>
-      <p:sp>
-        <p:nvSpPr>
-          <p:cNvPr id="35" name="Freeform 34"/>
-          <p:cNvSpPr/>
-          <p:nvPr/>
-        </p:nvSpPr>
-        <p:spPr>
-          <a:xfrm>
-            <a:off x="2784960" y="1182240"/>
-            <a:ext cx="190080" cy="120960"/>
+            <a:off x="0" y="180000"/>
+            <a:ext cx="720000" cy="1440000"/>
           </a:xfrm>
           <a:custGeom>
             <a:avLst/>
@@ -4211,22 +3115,106 @@
             <a:cxnLst/>
             <a:rect l="l" t="t" r="r" b="b"/>
             <a:pathLst>
-              <a:path w="190080" h="120960">
+              <a:path w="720000" h="1440000">
                 <a:moveTo>
                   <a:pt x="0" y="0"/>
                 </a:moveTo>
                 <a:lnTo>
-                  <a:pt x="190080" y="0"/>
+                  <a:pt x="75260" y="3944"/>
                 </a:lnTo>
                 <a:lnTo>
-                  <a:pt x="95040" y="120960"/>
+                  <a:pt x="149696" y="15734"/>
+                </a:lnTo>
+                <a:lnTo>
+                  <a:pt x="222492" y="35239"/>
+                </a:lnTo>
+                <a:lnTo>
+                  <a:pt x="292850" y="62247"/>
+                </a:lnTo>
+                <a:lnTo>
+                  <a:pt x="360000" y="96462"/>
+                </a:lnTo>
+                <a:lnTo>
+                  <a:pt x="423205" y="137508"/>
+                </a:lnTo>
+                <a:lnTo>
+                  <a:pt x="481774" y="184936"/>
+                </a:lnTo>
+                <a:lnTo>
+                  <a:pt x="535064" y="238226"/>
+                </a:lnTo>
+                <a:lnTo>
+                  <a:pt x="582492" y="296795"/>
+                </a:lnTo>
+                <a:lnTo>
+                  <a:pt x="623538" y="360000"/>
+                </a:lnTo>
+                <a:lnTo>
+                  <a:pt x="657753" y="427150"/>
+                </a:lnTo>
+                <a:lnTo>
+                  <a:pt x="684761" y="497508"/>
+                </a:lnTo>
+                <a:lnTo>
+                  <a:pt x="704266" y="570304"/>
+                </a:lnTo>
+                <a:lnTo>
+                  <a:pt x="716056" y="644740"/>
+                </a:lnTo>
+                <a:lnTo>
+                  <a:pt x="720000" y="720000"/>
+                </a:lnTo>
+                <a:lnTo>
+                  <a:pt x="716056" y="795260"/>
+                </a:lnTo>
+                <a:lnTo>
+                  <a:pt x="704266" y="869696"/>
+                </a:lnTo>
+                <a:lnTo>
+                  <a:pt x="684761" y="942492"/>
+                </a:lnTo>
+                <a:lnTo>
+                  <a:pt x="657753" y="1012850"/>
+                </a:lnTo>
+                <a:lnTo>
+                  <a:pt x="623538" y="1080000"/>
+                </a:lnTo>
+                <a:lnTo>
+                  <a:pt x="582492" y="1143205"/>
+                </a:lnTo>
+                <a:lnTo>
+                  <a:pt x="535064" y="1201774"/>
+                </a:lnTo>
+                <a:lnTo>
+                  <a:pt x="481774" y="1255064"/>
+                </a:lnTo>
+                <a:lnTo>
+                  <a:pt x="423205" y="1302492"/>
+                </a:lnTo>
+                <a:lnTo>
+                  <a:pt x="360000" y="1343538"/>
+                </a:lnTo>
+                <a:lnTo>
+                  <a:pt x="292850" y="1377753"/>
+                </a:lnTo>
+                <a:lnTo>
+                  <a:pt x="222492" y="1404761"/>
+                </a:lnTo>
+                <a:lnTo>
+                  <a:pt x="149696" y="1424266"/>
+                </a:lnTo>
+                <a:lnTo>
+                  <a:pt x="75260" y="1436056"/>
+                </a:lnTo>
+                <a:lnTo>
+                  <a:pt x="0" y="1440000"/>
                 </a:lnTo>
                 <a:close/>
               </a:path>
             </a:pathLst>
           </a:custGeom>
           <a:solidFill>
-            <a:srgbClr val="FADBC7"/>
+            <a:srgbClr val="111111"/>
           </a:solidFill>
           <a:ln>
             <a:noFill/>
@@ -4237,6 +3225,435 @@
           <a:lstStyle/>
           <a:p>
             <a:pPr algn="ctr"/>
+          </a:p>
+        </p:txBody>
+      </p:sp>
+      <p:sp>
+        <p:nvSpPr>
+          <p:cNvPr id="3" name="텍스트"/>
+          <p:cNvSpPr txBox="1"/>
+          <p:nvPr/>
+        </p:nvSpPr>
+        <p:spPr>
+          <a:xfrm>
+            <a:off x="36000" y="540000"/>
+            <a:ext cx="540000" cy="720000"/>
+          </a:xfrm>
+          <a:prstGeom prst="rect">
+            <a:avLst/>
+          </a:prstGeom>
+          <a:noFill/>
+        </p:spPr>
+        <p:txBody>
+          <a:bodyPr wrap="square" lIns="0" rIns="0" tIns="0" bIns="0" anchor="ctr">
+            <a:spAutoFit/>
+          </a:bodyPr>
+          <a:lstStyle/>
+          <a:p>
+            <a:pPr algn="ctr">
+              <a:lnSpc>
+                <a:spcPts val="4350"/>
+              </a:lnSpc>
+            </a:pPr>
+            <a:r>
+              <a:rPr sz="3000" b="1">
+                <a:solidFill>
+                  <a:srgbClr val="FFFFFF"/>
+                </a:solidFill>
+                <a:latin typeface="맑은 고딕"/>
+                <a:ea typeface="맑은 고딕"/>
+              </a:rPr>
+              <a:t>임</a:t>
+            </a:r>
+          </a:p>
+        </p:txBody>
+      </p:sp>
+      <p:sp>
+        <p:nvSpPr>
+          <p:cNvPr id="4" name="텍스트"/>
+          <p:cNvSpPr txBox="1"/>
+          <p:nvPr/>
+        </p:nvSpPr>
+        <p:spPr>
+          <a:xfrm>
+            <a:off x="1116000" y="223200"/>
+            <a:ext cx="1872000" cy="133351"/>
+          </a:xfrm>
+          <a:prstGeom prst="rect">
+            <a:avLst/>
+          </a:prstGeom>
+          <a:noFill/>
+        </p:spPr>
+        <p:txBody>
+          <a:bodyPr wrap="square" lIns="0" rIns="0" tIns="0" bIns="0" anchor="t">
+            <a:spAutoFit/>
+          </a:bodyPr>
+          <a:lstStyle/>
+          <a:p>
+            <a:pPr algn="l">
+              <a:lnSpc>
+                <a:spcPts val="1015"/>
+              </a:lnSpc>
+            </a:pPr>
+            <a:r>
+              <a:rPr sz="700" b="1" spc="200">
+                <a:solidFill>
+                  <a:srgbClr val="6B7280"/>
+                </a:solidFill>
+                <a:latin typeface="맑은 고딕"/>
+                <a:ea typeface="맑은 고딕"/>
+              </a:rPr>
+              <a:t>의원 · 약국 이름</a:t>
+            </a:r>
+          </a:p>
+        </p:txBody>
+      </p:sp>
+      <p:sp>
+        <p:nvSpPr>
+          <p:cNvPr id="5" name="텍스트"/>
+          <p:cNvSpPr txBox="1"/>
+          <p:nvPr/>
+        </p:nvSpPr>
+        <p:spPr>
+          <a:xfrm>
+            <a:off x="1116000" y="540000"/>
+            <a:ext cx="1872000" cy="360000"/>
+          </a:xfrm>
+          <a:prstGeom prst="rect">
+            <a:avLst/>
+          </a:prstGeom>
+          <a:noFill/>
+        </p:spPr>
+        <p:txBody>
+          <a:bodyPr wrap="square" lIns="0" rIns="0" tIns="0" bIns="0" anchor="t">
+            <a:spAutoFit/>
+          </a:bodyPr>
+          <a:lstStyle/>
+          <a:p>
+            <a:pPr algn="l">
+              <a:lnSpc>
+                <a:spcPts val="3190"/>
+              </a:lnSpc>
+            </a:pPr>
+            <a:r>
+              <a:rPr sz="2200" b="1">
+                <a:solidFill>
+                  <a:srgbClr val="12151C"/>
+                </a:solidFill>
+                <a:latin typeface="맑은 고딕"/>
+                <a:ea typeface="맑은 고딕"/>
+              </a:rPr>
+              <a:t>임건우</a:t>
+            </a:r>
+          </a:p>
+        </p:txBody>
+      </p:sp>
+      <p:sp>
+        <p:nvSpPr>
+          <p:cNvPr id="6" name="텍스트"/>
+          <p:cNvSpPr txBox="1"/>
+          <p:nvPr/>
+        </p:nvSpPr>
+        <p:spPr>
+          <a:xfrm>
+            <a:off x="1116000" y="943200"/>
+            <a:ext cx="1872000" cy="171451"/>
+          </a:xfrm>
+          <a:prstGeom prst="rect">
+            <a:avLst/>
+          </a:prstGeom>
+          <a:noFill/>
+        </p:spPr>
+        <p:txBody>
+          <a:bodyPr wrap="square" lIns="0" rIns="0" tIns="0" bIns="0" anchor="t">
+            <a:spAutoFit/>
+          </a:bodyPr>
+          <a:lstStyle/>
+          <a:p>
+            <a:pPr algn="l">
+              <a:lnSpc>
+                <a:spcPts val="1305"/>
+              </a:lnSpc>
+            </a:pPr>
+            <a:r>
+              <a:rPr sz="900" b="0">
+                <a:solidFill>
+                  <a:srgbClr val="6B7280"/>
+                </a:solidFill>
+                <a:latin typeface="맑은 고딕"/>
+                <a:ea typeface="맑은 고딕"/>
+              </a:rPr>
+              <a:t>영양사</a:t>
+            </a:r>
+          </a:p>
+        </p:txBody>
+      </p:sp>
+      <p:sp>
+        <p:nvSpPr>
+          <p:cNvPr id="7" name="Rectangle 6"/>
+          <p:cNvSpPr/>
+          <p:nvPr/>
+        </p:nvSpPr>
+        <p:spPr>
+          <a:xfrm>
+            <a:off x="1116000" y="1195200"/>
+            <a:ext cx="144000" cy="18000"/>
+          </a:xfrm>
+          <a:prstGeom prst="rect">
+            <a:avLst/>
+          </a:prstGeom>
+          <a:solidFill>
+            <a:srgbClr val="111111"/>
+          </a:solidFill>
+          <a:ln>
+            <a:noFill/>
+          </a:ln>
+        </p:spPr>
+        <p:txBody>
+          <a:bodyPr rtlCol="0" anchor="ctr"/>
+          <a:lstStyle/>
+          <a:p>
+            <a:pPr algn="ctr"/>
+          </a:p>
+        </p:txBody>
+      </p:sp>
+      <p:sp>
+        <p:nvSpPr>
+          <p:cNvPr id="8" name="텍스트"/>
+          <p:cNvSpPr txBox="1"/>
+          <p:nvPr/>
+        </p:nvSpPr>
+        <p:spPr>
+          <a:xfrm>
+            <a:off x="1116000" y="1328400"/>
+            <a:ext cx="331200" cy="99061"/>
+          </a:xfrm>
+          <a:prstGeom prst="rect">
+            <a:avLst/>
+          </a:prstGeom>
+          <a:noFill/>
+        </p:spPr>
+        <p:txBody>
+          <a:bodyPr wrap="square" lIns="0" rIns="0" tIns="0" bIns="0" anchor="t">
+            <a:spAutoFit/>
+          </a:bodyPr>
+          <a:lstStyle/>
+          <a:p>
+            <a:pPr algn="l">
+              <a:lnSpc>
+                <a:spcPts val="754"/>
+              </a:lnSpc>
+            </a:pPr>
+            <a:r>
+              <a:rPr sz="520" b="1" spc="120">
+                <a:solidFill>
+                  <a:srgbClr val="6B7280"/>
+                </a:solidFill>
+                <a:latin typeface="맑은 고딕"/>
+                <a:ea typeface="맑은 고딕"/>
+              </a:rPr>
+              <a:t>TEL</a:t>
+            </a:r>
+          </a:p>
+        </p:txBody>
+      </p:sp>
+      <p:sp>
+        <p:nvSpPr>
+          <p:cNvPr id="9" name="텍스트"/>
+          <p:cNvSpPr txBox="1"/>
+          <p:nvPr/>
+        </p:nvSpPr>
+        <p:spPr>
+          <a:xfrm>
+            <a:off x="1447200" y="1317600"/>
+            <a:ext cx="1440000" cy="133351"/>
+          </a:xfrm>
+          <a:prstGeom prst="rect">
+            <a:avLst/>
+          </a:prstGeom>
+          <a:noFill/>
+        </p:spPr>
+        <p:txBody>
+          <a:bodyPr wrap="square" lIns="0" rIns="0" tIns="0" bIns="0" anchor="t">
+            <a:spAutoFit/>
+          </a:bodyPr>
+          <a:lstStyle/>
+          <a:p>
+            <a:pPr algn="l">
+              <a:lnSpc>
+                <a:spcPts val="1015"/>
+              </a:lnSpc>
+            </a:pPr>
+            <a:r>
+              <a:rPr sz="700" b="0">
+                <a:solidFill>
+                  <a:srgbClr val="12151C"/>
+                </a:solidFill>
+                <a:latin typeface="맑은 고딕"/>
+                <a:ea typeface="맑은 고딕"/>
+              </a:rPr>
+              <a:t>010-1234-5678</a:t>
+            </a:r>
+          </a:p>
+        </p:txBody>
+      </p:sp>
+      <p:sp>
+        <p:nvSpPr>
+          <p:cNvPr id="10" name="텍스트"/>
+          <p:cNvSpPr txBox="1"/>
+          <p:nvPr/>
+        </p:nvSpPr>
+        <p:spPr>
+          <a:xfrm>
+            <a:off x="1116000" y="1458000"/>
+            <a:ext cx="331200" cy="99061"/>
+          </a:xfrm>
+          <a:prstGeom prst="rect">
+            <a:avLst/>
+          </a:prstGeom>
+          <a:noFill/>
+        </p:spPr>
+        <p:txBody>
+          <a:bodyPr wrap="square" lIns="0" rIns="0" tIns="0" bIns="0" anchor="t">
+            <a:spAutoFit/>
+          </a:bodyPr>
+          <a:lstStyle/>
+          <a:p>
+            <a:pPr algn="l">
+              <a:lnSpc>
+                <a:spcPts val="754"/>
+              </a:lnSpc>
+            </a:pPr>
+            <a:r>
+              <a:rPr sz="520" b="1" spc="120">
+                <a:solidFill>
+                  <a:srgbClr val="6B7280"/>
+                </a:solidFill>
+                <a:latin typeface="맑은 고딕"/>
+                <a:ea typeface="맑은 고딕"/>
+              </a:rPr>
+              <a:t>MAIL</a:t>
+            </a:r>
+          </a:p>
+        </p:txBody>
+      </p:sp>
+      <p:sp>
+        <p:nvSpPr>
+          <p:cNvPr id="11" name="텍스트"/>
+          <p:cNvSpPr txBox="1"/>
+          <p:nvPr/>
+        </p:nvSpPr>
+        <p:spPr>
+          <a:xfrm>
+            <a:off x="1447200" y="1447200"/>
+            <a:ext cx="1440000" cy="133351"/>
+          </a:xfrm>
+          <a:prstGeom prst="rect">
+            <a:avLst/>
+          </a:prstGeom>
+          <a:noFill/>
+        </p:spPr>
+        <p:txBody>
+          <a:bodyPr wrap="square" lIns="0" rIns="0" tIns="0" bIns="0" anchor="t">
+            <a:spAutoFit/>
+          </a:bodyPr>
+          <a:lstStyle/>
+          <a:p>
+            <a:pPr algn="l">
+              <a:lnSpc>
+                <a:spcPts val="1015"/>
+              </a:lnSpc>
+            </a:pPr>
+            <a:r>
+              <a:rPr sz="700" b="0">
+                <a:solidFill>
+                  <a:srgbClr val="12151C"/>
+                </a:solidFill>
+                <a:latin typeface="맑은 고딕"/>
+                <a:ea typeface="맑은 고딕"/>
+              </a:rPr>
+              <a:t>name@example.com</a:t>
+            </a:r>
+          </a:p>
+        </p:txBody>
+      </p:sp>
+      <p:sp>
+        <p:nvSpPr>
+          <p:cNvPr id="12" name="텍스트"/>
+          <p:cNvSpPr txBox="1"/>
+          <p:nvPr/>
+        </p:nvSpPr>
+        <p:spPr>
+          <a:xfrm>
+            <a:off x="1116000" y="1587600"/>
+            <a:ext cx="331200" cy="99061"/>
+          </a:xfrm>
+          <a:prstGeom prst="rect">
+            <a:avLst/>
+          </a:prstGeom>
+          <a:noFill/>
+        </p:spPr>
+        <p:txBody>
+          <a:bodyPr wrap="square" lIns="0" rIns="0" tIns="0" bIns="0" anchor="t">
+            <a:spAutoFit/>
+          </a:bodyPr>
+          <a:lstStyle/>
+          <a:p>
+            <a:pPr algn="l">
+              <a:lnSpc>
+                <a:spcPts val="754"/>
+              </a:lnSpc>
+            </a:pPr>
+            <a:r>
+              <a:rPr sz="520" b="1" spc="120">
+                <a:solidFill>
+                  <a:srgbClr val="6B7280"/>
+                </a:solidFill>
+                <a:latin typeface="맑은 고딕"/>
+                <a:ea typeface="맑은 고딕"/>
+              </a:rPr>
+              <a:t>ADDR</a:t>
+            </a:r>
+          </a:p>
+        </p:txBody>
+      </p:sp>
+      <p:sp>
+        <p:nvSpPr>
+          <p:cNvPr id="13" name="텍스트"/>
+          <p:cNvSpPr txBox="1"/>
+          <p:nvPr/>
+        </p:nvSpPr>
+        <p:spPr>
+          <a:xfrm>
+            <a:off x="1447200" y="1576800"/>
+            <a:ext cx="1440000" cy="133351"/>
+          </a:xfrm>
+          <a:prstGeom prst="rect">
+            <a:avLst/>
+          </a:prstGeom>
+          <a:noFill/>
+        </p:spPr>
+        <p:txBody>
+          <a:bodyPr wrap="square" lIns="0" rIns="0" tIns="0" bIns="0" anchor="t">
+            <a:spAutoFit/>
+          </a:bodyPr>
+          <a:lstStyle/>
+          <a:p>
+            <a:pPr algn="l">
+              <a:lnSpc>
+                <a:spcPts val="1015"/>
+              </a:lnSpc>
+            </a:pPr>
+            <a:r>
+              <a:rPr sz="700" b="0">
+                <a:solidFill>
+                  <a:srgbClr val="12151C"/>
+                </a:solidFill>
+                <a:latin typeface="맑은 고딕"/>
+                <a:ea typeface="맑은 고딕"/>
+              </a:rPr>
+              <a:t>주소를 입력해 주세요</a:t>
+            </a:r>
           </a:p>
         </p:txBody>
       </p:sp>
@@ -4254,7 +3671,7 @@
     <p:bg>
       <p:bgPr>
         <a:solidFill>
-          <a:srgbClr val="742F4C"/>
+          <a:srgbClr val="0E1116"/>
         </a:solidFill>
         <a:effectLst/>
       </p:bgPr>
@@ -4268,20 +3685,20 @@
       <p:grpSpPr/>
       <p:sp>
         <p:nvSpPr>
-          <p:cNvPr id="2" name="Oval 1"/>
+          <p:cNvPr id="2" name="Rectangle 1"/>
           <p:cNvSpPr/>
           <p:nvPr/>
         </p:nvSpPr>
         <p:spPr>
           <a:xfrm>
-            <a:off x="1081440" y="440640"/>
-            <a:ext cx="601920" cy="601920"/>
+            <a:off x="2088000" y="0"/>
+            <a:ext cx="1152000" cy="1800000"/>
           </a:xfrm>
-          <a:prstGeom prst="ellipse">
+          <a:prstGeom prst="rect">
             <a:avLst/>
           </a:prstGeom>
           <a:solidFill>
-            <a:srgbClr val="CC82A1"/>
+            <a:srgbClr val="818181"/>
           </a:solidFill>
           <a:ln>
             <a:noFill/>
@@ -4303,17 +3720,17 @@
         </p:nvSpPr>
         <p:spPr>
           <a:xfrm>
-            <a:off x="1556640" y="440640"/>
-            <a:ext cx="601920" cy="601920"/>
+            <a:off x="2397600" y="633600"/>
+            <a:ext cx="532800" cy="532800"/>
           </a:xfrm>
           <a:prstGeom prst="ellipse">
             <a:avLst/>
           </a:prstGeom>
-          <a:solidFill>
-            <a:srgbClr val="CC82A1"/>
-          </a:solidFill>
-          <a:ln>
-            <a:noFill/>
+          <a:noFill/>
+          <a:ln w="10800">
+            <a:solidFill>
+              <a:srgbClr val="FFFFFF"/>
+            </a:solidFill>
           </a:ln>
         </p:spPr>
         <p:txBody>
@@ -4326,92 +3743,14 @@
       </p:sp>
       <p:sp>
         <p:nvSpPr>
-          <p:cNvPr id="4" name="Freeform 3"/>
-          <p:cNvSpPr/>
+          <p:cNvPr id="4" name="텍스트"/>
+          <p:cNvSpPr txBox="1"/>
           <p:nvPr/>
         </p:nvSpPr>
         <p:spPr>
           <a:xfrm>
-            <a:off x="1097280" y="868320"/>
-            <a:ext cx="1045440" cy="665280"/>
-          </a:xfrm>
-          <a:custGeom>
-            <a:avLst/>
-            <a:gdLst/>
-            <a:ahLst/>
-            <a:cxnLst/>
-            <a:rect l="l" t="t" r="r" b="b"/>
-            <a:pathLst>
-              <a:path w="1045440" h="665280">
-                <a:moveTo>
-                  <a:pt x="0" y="0"/>
-                </a:moveTo>
-                <a:lnTo>
-                  <a:pt x="1045440" y="0"/>
-                </a:lnTo>
-                <a:lnTo>
-                  <a:pt x="522720" y="665280"/>
-                </a:lnTo>
-                <a:close/>
-              </a:path>
-            </a:pathLst>
-          </a:custGeom>
-          <a:solidFill>
-            <a:srgbClr val="CC82A1"/>
-          </a:solidFill>
-          <a:ln>
-            <a:noFill/>
-          </a:ln>
-        </p:spPr>
-        <p:txBody>
-          <a:bodyPr rtlCol="0" anchor="ctr"/>
-          <a:lstStyle/>
-          <a:p>
-            <a:pPr algn="ctr"/>
-          </a:p>
-        </p:txBody>
-      </p:sp>
-      <p:sp>
-        <p:nvSpPr>
-          <p:cNvPr id="5" name="Rectangle 4"/>
-          <p:cNvSpPr/>
-          <p:nvPr/>
-        </p:nvSpPr>
-        <p:spPr>
-          <a:xfrm>
-            <a:off x="0" y="0"/>
-            <a:ext cx="3240000" cy="1800000"/>
-          </a:xfrm>
-          <a:prstGeom prst="rect">
-            <a:avLst/>
-          </a:prstGeom>
-          <a:solidFill>
-            <a:srgbClr val="742F4C">
-              <a:alpha val="90000"/>
-            </a:srgbClr>
-          </a:solidFill>
-          <a:ln>
-            <a:noFill/>
-          </a:ln>
-        </p:spPr>
-        <p:txBody>
-          <a:bodyPr rtlCol="0" anchor="ctr"/>
-          <a:lstStyle/>
-          <a:p>
-            <a:pPr algn="ctr"/>
-          </a:p>
-        </p:txBody>
-      </p:sp>
-      <p:sp>
-        <p:nvSpPr>
-          <p:cNvPr id="6" name="텍스트"/>
-          <p:cNvSpPr txBox="1"/>
-          <p:nvPr/>
-        </p:nvSpPr>
-        <p:spPr>
-          <a:xfrm>
-            <a:off x="396000" y="612000"/>
-            <a:ext cx="2448000" cy="432000"/>
+            <a:off x="2304000" y="684000"/>
+            <a:ext cx="720000" cy="432000"/>
           </a:xfrm>
           <a:prstGeom prst="rect">
             <a:avLst/>
@@ -4426,61 +3765,32 @@
           <a:p>
             <a:pPr algn="ctr">
               <a:lnSpc>
-                <a:spcPts val="1739"/>
+                <a:spcPts val="4350"/>
               </a:lnSpc>
             </a:pPr>
             <a:r>
-              <a:rPr sz="1200" b="1">
+              <a:rPr sz="3000" b="1">
                 <a:solidFill>
                   <a:srgbClr val="FFFFFF"/>
                 </a:solidFill>
-                <a:latin typeface="바탕"/>
-                <a:ea typeface="바탕"/>
+                <a:latin typeface="맑은 고딕"/>
+                <a:ea typeface="맑은 고딕"/>
               </a:rPr>
-              <a:t>건강은 꾸준한 관심에서 시작됩니다</a:t>
-            </a:r>
-          </a:p>
-        </p:txBody>
-      </p:sp>
-      <p:sp>
-        <p:nvSpPr>
-          <p:cNvPr id="7" name="Rectangle 6"/>
-          <p:cNvSpPr/>
+              <a:t>의</a:t>
+            </a:r>
+          </a:p>
+        </p:txBody>
+      </p:sp>
+      <p:sp>
+        <p:nvSpPr>
+          <p:cNvPr id="5" name="텍스트"/>
+          <p:cNvSpPr txBox="1"/>
           <p:nvPr/>
         </p:nvSpPr>
         <p:spPr>
           <a:xfrm>
-            <a:off x="1512000" y="1173600"/>
-            <a:ext cx="216000" cy="10800"/>
-          </a:xfrm>
-          <a:prstGeom prst="rect">
-            <a:avLst/>
-          </a:prstGeom>
-          <a:solidFill>
-            <a:srgbClr val="CC82A1"/>
-          </a:solidFill>
-          <a:ln>
-            <a:noFill/>
-          </a:ln>
-        </p:spPr>
-        <p:txBody>
-          <a:bodyPr rtlCol="0" anchor="ctr"/>
-          <a:lstStyle/>
-          <a:p>
-            <a:pPr algn="ctr"/>
-          </a:p>
-        </p:txBody>
-      </p:sp>
-      <p:sp>
-        <p:nvSpPr>
-          <p:cNvPr id="8" name="텍스트"/>
-          <p:cNvSpPr txBox="1"/>
-          <p:nvPr/>
-        </p:nvSpPr>
-        <p:spPr>
-          <a:xfrm>
-            <a:off x="360000" y="1288800"/>
-            <a:ext cx="2520000" cy="108000"/>
+            <a:off x="252000" y="540000"/>
+            <a:ext cx="1620000" cy="720000"/>
           </a:xfrm>
           <a:prstGeom prst="rect">
             <a:avLst/>
@@ -4493,15 +3803,72 @@
           </a:bodyPr>
           <a:lstStyle/>
           <a:p>
-            <a:pPr algn="ctr">
+            <a:pPr algn="l">
               <a:lnSpc>
-                <a:spcPts val="1087"/>
+                <a:spcPts val="1739"/>
               </a:lnSpc>
             </a:pPr>
             <a:r>
-              <a:rPr sz="750" b="1" spc="300">
+              <a:rPr sz="1200" b="1">
                 <a:solidFill>
-                  <a:srgbClr val="CEB6C0"/>
+                  <a:srgbClr val="FFFFFF"/>
+                </a:solidFill>
+                <a:latin typeface="맑은 고딕"/>
+                <a:ea typeface="맑은 고딕"/>
+              </a:rPr>
+              <a:t>건강은 꾸준한</a:t>
+            </a:r>
+          </a:p>
+          <a:p>
+            <a:pPr algn="l">
+              <a:lnSpc>
+                <a:spcPts val="1739"/>
+              </a:lnSpc>
+            </a:pPr>
+            <a:r>
+              <a:rPr sz="1200" b="1">
+                <a:solidFill>
+                  <a:srgbClr val="FFFFFF"/>
+                </a:solidFill>
+                <a:latin typeface="맑은 고딕"/>
+                <a:ea typeface="맑은 고딕"/>
+              </a:rPr>
+              <a:t>관심에서 시작됩니다</a:t>
+            </a:r>
+          </a:p>
+        </p:txBody>
+      </p:sp>
+      <p:sp>
+        <p:nvSpPr>
+          <p:cNvPr id="6" name="텍스트"/>
+          <p:cNvSpPr txBox="1"/>
+          <p:nvPr/>
+        </p:nvSpPr>
+        <p:spPr>
+          <a:xfrm>
+            <a:off x="252000" y="1512000"/>
+            <a:ext cx="1584000" cy="123826"/>
+          </a:xfrm>
+          <a:prstGeom prst="rect">
+            <a:avLst/>
+          </a:prstGeom>
+          <a:noFill/>
+        </p:spPr>
+        <p:txBody>
+          <a:bodyPr wrap="square" lIns="0" rIns="0" tIns="0" bIns="0" anchor="t">
+            <a:spAutoFit/>
+          </a:bodyPr>
+          <a:lstStyle/>
+          <a:p>
+            <a:pPr algn="l">
+              <a:lnSpc>
+                <a:spcPts val="942"/>
+              </a:lnSpc>
+            </a:pPr>
+            <a:r>
+              <a:rPr sz="650" b="1" spc="200">
+                <a:solidFill>
+                  <a:srgbClr val="A3A9B5"/>
                 </a:solidFill>
                 <a:latin typeface="맑은 고딕"/>
                 <a:ea typeface="맑은 고딕"/>

--- a/public/fun/cards/care/care-10.pptx
+++ b/public/fun/cards/care/care-10.pptx
@@ -3105,8 +3105,8 @@
         </p:nvSpPr>
         <p:spPr>
           <a:xfrm>
-            <a:off x="0" y="180000"/>
-            <a:ext cx="720000" cy="1440000"/>
+            <a:off x="0" y="216000"/>
+            <a:ext cx="684000" cy="1368000"/>
           </a:xfrm>
           <a:custGeom>
             <a:avLst/>
@@ -3115,99 +3115,99 @@
             <a:cxnLst/>
             <a:rect l="l" t="t" r="r" b="b"/>
             <a:pathLst>
-              <a:path w="720000" h="1440000">
+              <a:path w="684000" h="1368000">
                 <a:moveTo>
                   <a:pt x="0" y="0"/>
                 </a:moveTo>
                 <a:lnTo>
-                  <a:pt x="75260" y="3944"/>
+                  <a:pt x="71497" y="3747"/>
                 </a:lnTo>
                 <a:lnTo>
-                  <a:pt x="149696" y="15734"/>
+                  <a:pt x="142212" y="14947"/>
                 </a:lnTo>
                 <a:lnTo>
-                  <a:pt x="222492" y="35239"/>
+                  <a:pt x="211368" y="33477"/>
                 </a:lnTo>
                 <a:lnTo>
-                  <a:pt x="292850" y="62247"/>
+                  <a:pt x="278208" y="59135"/>
                 </a:lnTo>
                 <a:lnTo>
-                  <a:pt x="360000" y="96462"/>
+                  <a:pt x="342000" y="91639"/>
                 </a:lnTo>
                 <a:lnTo>
-                  <a:pt x="423205" y="137508"/>
+                  <a:pt x="402045" y="130632"/>
                 </a:lnTo>
                 <a:lnTo>
-                  <a:pt x="481774" y="184936"/>
+                  <a:pt x="457685" y="175689"/>
                 </a:lnTo>
                 <a:lnTo>
-                  <a:pt x="535064" y="238226"/>
+                  <a:pt x="508311" y="226315"/>
                 </a:lnTo>
                 <a:lnTo>
-                  <a:pt x="582492" y="296795"/>
+                  <a:pt x="553368" y="281955"/>
                 </a:lnTo>
                 <a:lnTo>
-                  <a:pt x="623538" y="360000"/>
+                  <a:pt x="592361" y="342000"/>
                 </a:lnTo>
                 <a:lnTo>
-                  <a:pt x="657753" y="427150"/>
+                  <a:pt x="624865" y="405792"/>
                 </a:lnTo>
                 <a:lnTo>
-                  <a:pt x="684761" y="497508"/>
+                  <a:pt x="650523" y="472632"/>
                 </a:lnTo>
                 <a:lnTo>
-                  <a:pt x="704266" y="570304"/>
+                  <a:pt x="669053" y="541788"/>
                 </a:lnTo>
                 <a:lnTo>
-                  <a:pt x="716056" y="644740"/>
+                  <a:pt x="680253" y="612503"/>
                 </a:lnTo>
                 <a:lnTo>
-                  <a:pt x="720000" y="720000"/>
+                  <a:pt x="684000" y="684000"/>
                 </a:lnTo>
                 <a:lnTo>
-                  <a:pt x="716056" y="795260"/>
+                  <a:pt x="680253" y="755497"/>
                 </a:lnTo>
                 <a:lnTo>
-                  <a:pt x="704266" y="869696"/>
+                  <a:pt x="669053" y="826212"/>
                 </a:lnTo>
                 <a:lnTo>
-                  <a:pt x="684761" y="942492"/>
+                  <a:pt x="650523" y="895368"/>
                 </a:lnTo>
                 <a:lnTo>
-                  <a:pt x="657753" y="1012850"/>
+                  <a:pt x="624865" y="962208"/>
                 </a:lnTo>
                 <a:lnTo>
-                  <a:pt x="623538" y="1080000"/>
+                  <a:pt x="592361" y="1026000"/>
                 </a:lnTo>
                 <a:lnTo>
-                  <a:pt x="582492" y="1143205"/>
+                  <a:pt x="553368" y="1086045"/>
                 </a:lnTo>
                 <a:lnTo>
-                  <a:pt x="535064" y="1201774"/>
+                  <a:pt x="508311" y="1141685"/>
                 </a:lnTo>
                 <a:lnTo>
-                  <a:pt x="481774" y="1255064"/>
+                  <a:pt x="457685" y="1192311"/>
                 </a:lnTo>
                 <a:lnTo>
-                  <a:pt x="423205" y="1302492"/>
+                  <a:pt x="402045" y="1237368"/>
                 </a:lnTo>
                 <a:lnTo>
-                  <a:pt x="360000" y="1343538"/>
+                  <a:pt x="342000" y="1276361"/>
                 </a:lnTo>
                 <a:lnTo>
-                  <a:pt x="292850" y="1377753"/>
+                  <a:pt x="278208" y="1308865"/>
                 </a:lnTo>
                 <a:lnTo>
-                  <a:pt x="222492" y="1404761"/>
+                  <a:pt x="211368" y="1334523"/>
                 </a:lnTo>
                 <a:lnTo>
-                  <a:pt x="149696" y="1424266"/>
+                  <a:pt x="142212" y="1353053"/>
                 </a:lnTo>
                 <a:lnTo>
-                  <a:pt x="75260" y="1436056"/>
+                  <a:pt x="71497" y="1364253"/>
                 </a:lnTo>
                 <a:lnTo>
-                  <a:pt x="0" y="1440000"/>
+                  <a:pt x="0" y="1368000"/>
                 </a:lnTo>
                 <a:close/>
               </a:path>
@@ -3230,14 +3230,72 @@
       </p:sp>
       <p:sp>
         <p:nvSpPr>
-          <p:cNvPr id="3" name="텍스트"/>
+          <p:cNvPr id="3" name="Oval 2"/>
+          <p:cNvSpPr/>
+          <p:nvPr/>
+        </p:nvSpPr>
+        <p:spPr>
+          <a:xfrm>
+            <a:off x="-432000" y="468000"/>
+            <a:ext cx="864000" cy="864000"/>
+          </a:xfrm>
+          <a:prstGeom prst="ellipse">
+            <a:avLst/>
+          </a:prstGeom>
+          <a:noFill/>
+          <a:ln w="4320">
+            <a:solidFill>
+              <a:srgbClr val="FFFFFF"/>
+            </a:solidFill>
+          </a:ln>
+        </p:spPr>
+        <p:txBody>
+          <a:bodyPr rtlCol="0" anchor="ctr"/>
+          <a:lstStyle/>
+          <a:p>
+            <a:pPr algn="ctr"/>
+          </a:p>
+        </p:txBody>
+      </p:sp>
+      <p:sp>
+        <p:nvSpPr>
+          <p:cNvPr id="4" name="Oval 3"/>
+          <p:cNvSpPr/>
+          <p:nvPr/>
+        </p:nvSpPr>
+        <p:spPr>
+          <a:xfrm>
+            <a:off x="-252000" y="648000"/>
+            <a:ext cx="504000" cy="504000"/>
+          </a:xfrm>
+          <a:prstGeom prst="ellipse">
+            <a:avLst/>
+          </a:prstGeom>
+          <a:noFill/>
+          <a:ln w="4320">
+            <a:solidFill>
+              <a:srgbClr val="FFFFFF"/>
+            </a:solidFill>
+          </a:ln>
+        </p:spPr>
+        <p:txBody>
+          <a:bodyPr rtlCol="0" anchor="ctr"/>
+          <a:lstStyle/>
+          <a:p>
+            <a:pPr algn="ctr"/>
+          </a:p>
+        </p:txBody>
+      </p:sp>
+      <p:sp>
+        <p:nvSpPr>
+          <p:cNvPr id="5" name="텍스트"/>
           <p:cNvSpPr txBox="1"/>
           <p:nvPr/>
         </p:nvSpPr>
         <p:spPr>
           <a:xfrm>
-            <a:off x="36000" y="540000"/>
-            <a:ext cx="540000" cy="720000"/>
+            <a:off x="86400" y="612000"/>
+            <a:ext cx="324000" cy="576000"/>
           </a:xfrm>
           <a:prstGeom prst="rect">
             <a:avLst/>
@@ -3252,32 +3310,32 @@
           <a:p>
             <a:pPr algn="ctr">
               <a:lnSpc>
-                <a:spcPts val="4350"/>
+                <a:spcPts val="1450"/>
               </a:lnSpc>
             </a:pPr>
             <a:r>
-              <a:rPr sz="3000" b="1">
+              <a:rPr sz="1000" b="1">
                 <a:solidFill>
                   <a:srgbClr val="FFFFFF"/>
                 </a:solidFill>
                 <a:latin typeface="맑은 고딕"/>
                 <a:ea typeface="맑은 고딕"/>
               </a:rPr>
-              <a:t>임</a:t>
-            </a:r>
-          </a:p>
-        </p:txBody>
-      </p:sp>
-      <p:sp>
-        <p:nvSpPr>
-          <p:cNvPr id="4" name="텍스트"/>
+              <a:t>의</a:t>
+            </a:r>
+          </a:p>
+        </p:txBody>
+      </p:sp>
+      <p:sp>
+        <p:nvSpPr>
+          <p:cNvPr id="6" name="텍스트"/>
           <p:cNvSpPr txBox="1"/>
           <p:nvPr/>
         </p:nvSpPr>
         <p:spPr>
           <a:xfrm>
-            <a:off x="1116000" y="223200"/>
-            <a:ext cx="1872000" cy="133351"/>
+            <a:off x="1116000" y="252000"/>
+            <a:ext cx="1872000" cy="123826"/>
           </a:xfrm>
           <a:prstGeom prst="rect">
             <a:avLst/>
@@ -3292,11 +3350,11 @@
           <a:p>
             <a:pPr algn="l">
               <a:lnSpc>
-                <a:spcPts val="1015"/>
+                <a:spcPts val="942"/>
               </a:lnSpc>
             </a:pPr>
             <a:r>
-              <a:rPr sz="700" b="1" spc="200">
+              <a:rPr sz="650" b="1" spc="220">
                 <a:solidFill>
                   <a:srgbClr val="6B7280"/>
                 </a:solidFill>
@@ -3308,16 +3366,37 @@
           </a:p>
         </p:txBody>
       </p:sp>
-      <p:sp>
-        <p:nvSpPr>
-          <p:cNvPr id="5" name="텍스트"/>
+      <p:cxnSp>
+        <p:nvCxnSpPr>
+          <p:cNvPr id="7" name="Connector 6"/>
+          <p:cNvCxnSpPr/>
+          <p:nvPr/>
+        </p:nvCxnSpPr>
+        <p:spPr>
+          <a:xfrm>
+            <a:off x="1116000" y="424800"/>
+            <a:ext cx="1872000" cy="0"/>
+          </a:xfrm>
+          <a:prstGeom prst="line">
+            <a:avLst/>
+          </a:prstGeom>
+          <a:ln w="3600">
+            <a:solidFill>
+              <a:srgbClr val="DCDFE4"/>
+            </a:solidFill>
+          </a:ln>
+        </p:spPr>
+      </p:cxnSp>
+      <p:sp>
+        <p:nvSpPr>
+          <p:cNvPr id="8" name="텍스트"/>
           <p:cNvSpPr txBox="1"/>
           <p:nvPr/>
         </p:nvSpPr>
         <p:spPr>
           <a:xfrm>
-            <a:off x="1116000" y="540000"/>
-            <a:ext cx="1872000" cy="360000"/>
+            <a:off x="1116000" y="648000"/>
+            <a:ext cx="1800000" cy="237600"/>
           </a:xfrm>
           <a:prstGeom prst="rect">
             <a:avLst/>
@@ -3332,11 +3411,11 @@
           <a:p>
             <a:pPr algn="l">
               <a:lnSpc>
-                <a:spcPts val="3190"/>
+                <a:spcPts val="1957"/>
               </a:lnSpc>
             </a:pPr>
             <a:r>
-              <a:rPr sz="2200" b="1">
+              <a:rPr sz="1350" b="1" spc="120">
                 <a:solidFill>
                   <a:srgbClr val="12151C"/>
                 </a:solidFill>
@@ -3350,14 +3429,14 @@
       </p:sp>
       <p:sp>
         <p:nvSpPr>
-          <p:cNvPr id="6" name="텍스트"/>
+          <p:cNvPr id="9" name="텍스트"/>
           <p:cNvSpPr txBox="1"/>
           <p:nvPr/>
         </p:nvSpPr>
         <p:spPr>
           <a:xfrm>
-            <a:off x="1116000" y="943200"/>
-            <a:ext cx="1872000" cy="171451"/>
+            <a:off x="1116000" y="900000"/>
+            <a:ext cx="1800000" cy="133351"/>
           </a:xfrm>
           <a:prstGeom prst="rect">
             <a:avLst/>
@@ -3372,11 +3451,11 @@
           <a:p>
             <a:pPr algn="l">
               <a:lnSpc>
-                <a:spcPts val="1305"/>
+                <a:spcPts val="1015"/>
               </a:lnSpc>
             </a:pPr>
             <a:r>
-              <a:rPr sz="900" b="0">
+              <a:rPr sz="700" b="0" spc="60">
                 <a:solidFill>
                   <a:srgbClr val="6B7280"/>
                 </a:solidFill>
@@ -3388,45 +3467,37 @@
           </a:p>
         </p:txBody>
       </p:sp>
-      <p:sp>
-        <p:nvSpPr>
-          <p:cNvPr id="7" name="Rectangle 6"/>
-          <p:cNvSpPr/>
-          <p:nvPr/>
-        </p:nvSpPr>
-        <p:spPr>
-          <a:xfrm>
-            <a:off x="1116000" y="1195200"/>
-            <a:ext cx="144000" cy="18000"/>
-          </a:xfrm>
-          <a:prstGeom prst="rect">
-            <a:avLst/>
-          </a:prstGeom>
-          <a:solidFill>
-            <a:srgbClr val="111111"/>
-          </a:solidFill>
-          <a:ln>
-            <a:noFill/>
+      <p:cxnSp>
+        <p:nvCxnSpPr>
+          <p:cNvPr id="10" name="Connector 9"/>
+          <p:cNvCxnSpPr/>
+          <p:nvPr/>
+        </p:nvCxnSpPr>
+        <p:spPr>
+          <a:xfrm>
+            <a:off x="1116000" y="1267200"/>
+            <a:ext cx="1872000" cy="0"/>
+          </a:xfrm>
+          <a:prstGeom prst="line">
+            <a:avLst/>
+          </a:prstGeom>
+          <a:ln w="3600">
+            <a:solidFill>
+              <a:srgbClr val="DCDFE4"/>
+            </a:solidFill>
           </a:ln>
         </p:spPr>
-        <p:txBody>
-          <a:bodyPr rtlCol="0" anchor="ctr"/>
-          <a:lstStyle/>
-          <a:p>
-            <a:pPr algn="ctr"/>
-          </a:p>
-        </p:txBody>
-      </p:sp>
-      <p:sp>
-        <p:nvSpPr>
-          <p:cNvPr id="8" name="텍스트"/>
+      </p:cxnSp>
+      <p:sp>
+        <p:nvSpPr>
+          <p:cNvPr id="11" name="텍스트"/>
           <p:cNvSpPr txBox="1"/>
           <p:nvPr/>
         </p:nvSpPr>
         <p:spPr>
           <a:xfrm>
-            <a:off x="1116000" y="1328400"/>
-            <a:ext cx="331200" cy="99061"/>
+            <a:off x="1116000" y="1357200"/>
+            <a:ext cx="331200" cy="91441"/>
           </a:xfrm>
           <a:prstGeom prst="rect">
             <a:avLst/>
@@ -3441,11 +3512,11 @@
           <a:p>
             <a:pPr algn="l">
               <a:lnSpc>
-                <a:spcPts val="754"/>
+                <a:spcPts val="696"/>
               </a:lnSpc>
             </a:pPr>
             <a:r>
-              <a:rPr sz="520" b="1" spc="120">
+              <a:rPr sz="480" b="1" spc="140">
                 <a:solidFill>
                   <a:srgbClr val="6B7280"/>
                 </a:solidFill>
@@ -3459,14 +3530,14 @@
       </p:sp>
       <p:sp>
         <p:nvSpPr>
-          <p:cNvPr id="9" name="텍스트"/>
+          <p:cNvPr id="12" name="텍스트"/>
           <p:cNvSpPr txBox="1"/>
           <p:nvPr/>
         </p:nvSpPr>
         <p:spPr>
           <a:xfrm>
-            <a:off x="1447200" y="1317600"/>
-            <a:ext cx="1440000" cy="133351"/>
+            <a:off x="1447200" y="1346400"/>
+            <a:ext cx="1188000" cy="123826"/>
           </a:xfrm>
           <a:prstGeom prst="rect">
             <a:avLst/>
@@ -3481,11 +3552,11 @@
           <a:p>
             <a:pPr algn="l">
               <a:lnSpc>
-                <a:spcPts val="1015"/>
+                <a:spcPts val="942"/>
               </a:lnSpc>
             </a:pPr>
             <a:r>
-              <a:rPr sz="700" b="0">
+              <a:rPr sz="650" b="0">
                 <a:solidFill>
                   <a:srgbClr val="12151C"/>
                 </a:solidFill>
@@ -3499,14 +3570,14 @@
       </p:sp>
       <p:sp>
         <p:nvSpPr>
-          <p:cNvPr id="10" name="텍스트"/>
+          <p:cNvPr id="13" name="텍스트"/>
           <p:cNvSpPr txBox="1"/>
           <p:nvPr/>
         </p:nvSpPr>
         <p:spPr>
           <a:xfrm>
-            <a:off x="1116000" y="1458000"/>
-            <a:ext cx="331200" cy="99061"/>
+            <a:off x="1116000" y="1479600"/>
+            <a:ext cx="331200" cy="91441"/>
           </a:xfrm>
           <a:prstGeom prst="rect">
             <a:avLst/>
@@ -3521,11 +3592,11 @@
           <a:p>
             <a:pPr algn="l">
               <a:lnSpc>
-                <a:spcPts val="754"/>
+                <a:spcPts val="696"/>
               </a:lnSpc>
             </a:pPr>
             <a:r>
-              <a:rPr sz="520" b="1" spc="120">
+              <a:rPr sz="480" b="1" spc="140">
                 <a:solidFill>
                   <a:srgbClr val="6B7280"/>
                 </a:solidFill>
@@ -3539,14 +3610,14 @@
       </p:sp>
       <p:sp>
         <p:nvSpPr>
-          <p:cNvPr id="11" name="텍스트"/>
+          <p:cNvPr id="14" name="텍스트"/>
           <p:cNvSpPr txBox="1"/>
           <p:nvPr/>
         </p:nvSpPr>
         <p:spPr>
           <a:xfrm>
-            <a:off x="1447200" y="1447200"/>
-            <a:ext cx="1440000" cy="133351"/>
+            <a:off x="1447200" y="1468800"/>
+            <a:ext cx="1188000" cy="123826"/>
           </a:xfrm>
           <a:prstGeom prst="rect">
             <a:avLst/>
@@ -3561,11 +3632,11 @@
           <a:p>
             <a:pPr algn="l">
               <a:lnSpc>
-                <a:spcPts val="1015"/>
+                <a:spcPts val="942"/>
               </a:lnSpc>
             </a:pPr>
             <a:r>
-              <a:rPr sz="700" b="0">
+              <a:rPr sz="650" b="0">
                 <a:solidFill>
                   <a:srgbClr val="12151C"/>
                 </a:solidFill>
@@ -3579,14 +3650,14 @@
       </p:sp>
       <p:sp>
         <p:nvSpPr>
-          <p:cNvPr id="12" name="텍스트"/>
+          <p:cNvPr id="15" name="텍스트"/>
           <p:cNvSpPr txBox="1"/>
           <p:nvPr/>
         </p:nvSpPr>
         <p:spPr>
           <a:xfrm>
-            <a:off x="1116000" y="1587600"/>
-            <a:ext cx="331200" cy="99061"/>
+            <a:off x="1116000" y="1602000"/>
+            <a:ext cx="331200" cy="91441"/>
           </a:xfrm>
           <a:prstGeom prst="rect">
             <a:avLst/>
@@ -3601,11 +3672,11 @@
           <a:p>
             <a:pPr algn="l">
               <a:lnSpc>
-                <a:spcPts val="754"/>
+                <a:spcPts val="696"/>
               </a:lnSpc>
             </a:pPr>
             <a:r>
-              <a:rPr sz="520" b="1" spc="120">
+              <a:rPr sz="480" b="1" spc="140">
                 <a:solidFill>
                   <a:srgbClr val="6B7280"/>
                 </a:solidFill>
@@ -3619,14 +3690,14 @@
       </p:sp>
       <p:sp>
         <p:nvSpPr>
-          <p:cNvPr id="13" name="텍스트"/>
+          <p:cNvPr id="16" name="텍스트"/>
           <p:cNvSpPr txBox="1"/>
           <p:nvPr/>
         </p:nvSpPr>
         <p:spPr>
           <a:xfrm>
-            <a:off x="1447200" y="1576800"/>
-            <a:ext cx="1440000" cy="133351"/>
+            <a:off x="1447200" y="1591200"/>
+            <a:ext cx="1188000" cy="123826"/>
           </a:xfrm>
           <a:prstGeom prst="rect">
             <a:avLst/>
@@ -3641,11 +3712,11 @@
           <a:p>
             <a:pPr algn="l">
               <a:lnSpc>
-                <a:spcPts val="1015"/>
+                <a:spcPts val="942"/>
               </a:lnSpc>
             </a:pPr>
             <a:r>
-              <a:rPr sz="700" b="0">
+              <a:rPr sz="650" b="0">
                 <a:solidFill>
                   <a:srgbClr val="12151C"/>
                 </a:solidFill>
@@ -3691,8 +3762,8 @@
         </p:nvSpPr>
         <p:spPr>
           <a:xfrm>
-            <a:off x="2088000" y="0"/>
-            <a:ext cx="1152000" cy="1800000"/>
+            <a:off x="0" y="0"/>
+            <a:ext cx="1188000" cy="1800000"/>
           </a:xfrm>
           <a:prstGeom prst="rect">
             <a:avLst/>
@@ -3712,27 +3783,657 @@
           </a:p>
         </p:txBody>
       </p:sp>
-      <p:sp>
-        <p:nvSpPr>
-          <p:cNvPr id="3" name="Oval 2"/>
-          <p:cNvSpPr/>
-          <p:nvPr/>
-        </p:nvSpPr>
-        <p:spPr>
-          <a:xfrm>
-            <a:off x="2397600" y="633600"/>
-            <a:ext cx="532800" cy="532800"/>
-          </a:xfrm>
-          <a:prstGeom prst="ellipse">
-            <a:avLst/>
-          </a:prstGeom>
-          <a:noFill/>
-          <a:ln w="10800">
+      <p:cxnSp>
+        <p:nvCxnSpPr>
+          <p:cNvPr id="3" name="Connector 2"/>
+          <p:cNvCxnSpPr/>
+          <p:nvPr/>
+        </p:nvCxnSpPr>
+        <p:spPr>
+          <a:xfrm flipV="1">
+            <a:off x="0" y="1224000"/>
+            <a:ext cx="57600" cy="57600"/>
+          </a:xfrm>
+          <a:prstGeom prst="line">
+            <a:avLst/>
+          </a:prstGeom>
+          <a:ln w="3600">
             <a:solidFill>
               <a:srgbClr val="FFFFFF"/>
             </a:solidFill>
           </a:ln>
         </p:spPr>
+      </p:cxnSp>
+      <p:cxnSp>
+        <p:nvCxnSpPr>
+          <p:cNvPr id="4" name="Connector 3"/>
+          <p:cNvCxnSpPr/>
+          <p:nvPr/>
+        </p:nvCxnSpPr>
+        <p:spPr>
+          <a:xfrm flipV="1">
+            <a:off x="0" y="1224000"/>
+            <a:ext cx="115200" cy="115200"/>
+          </a:xfrm>
+          <a:prstGeom prst="line">
+            <a:avLst/>
+          </a:prstGeom>
+          <a:ln w="3600">
+            <a:solidFill>
+              <a:srgbClr val="FFFFFF"/>
+            </a:solidFill>
+          </a:ln>
+        </p:spPr>
+      </p:cxnSp>
+      <p:cxnSp>
+        <p:nvCxnSpPr>
+          <p:cNvPr id="5" name="Connector 4"/>
+          <p:cNvCxnSpPr/>
+          <p:nvPr/>
+        </p:nvCxnSpPr>
+        <p:spPr>
+          <a:xfrm flipV="1">
+            <a:off x="0" y="1224000"/>
+            <a:ext cx="172800" cy="172800"/>
+          </a:xfrm>
+          <a:prstGeom prst="line">
+            <a:avLst/>
+          </a:prstGeom>
+          <a:ln w="3600">
+            <a:solidFill>
+              <a:srgbClr val="FFFFFF"/>
+            </a:solidFill>
+          </a:ln>
+        </p:spPr>
+      </p:cxnSp>
+      <p:cxnSp>
+        <p:nvCxnSpPr>
+          <p:cNvPr id="6" name="Connector 5"/>
+          <p:cNvCxnSpPr/>
+          <p:nvPr/>
+        </p:nvCxnSpPr>
+        <p:spPr>
+          <a:xfrm flipV="1">
+            <a:off x="0" y="1224000"/>
+            <a:ext cx="230400" cy="230400"/>
+          </a:xfrm>
+          <a:prstGeom prst="line">
+            <a:avLst/>
+          </a:prstGeom>
+          <a:ln w="3600">
+            <a:solidFill>
+              <a:srgbClr val="FFFFFF"/>
+            </a:solidFill>
+          </a:ln>
+        </p:spPr>
+      </p:cxnSp>
+      <p:cxnSp>
+        <p:nvCxnSpPr>
+          <p:cNvPr id="7" name="Connector 6"/>
+          <p:cNvCxnSpPr/>
+          <p:nvPr/>
+        </p:nvCxnSpPr>
+        <p:spPr>
+          <a:xfrm flipV="1">
+            <a:off x="0" y="1224000"/>
+            <a:ext cx="288000" cy="288000"/>
+          </a:xfrm>
+          <a:prstGeom prst="line">
+            <a:avLst/>
+          </a:prstGeom>
+          <a:ln w="3600">
+            <a:solidFill>
+              <a:srgbClr val="FFFFFF"/>
+            </a:solidFill>
+          </a:ln>
+        </p:spPr>
+      </p:cxnSp>
+      <p:cxnSp>
+        <p:nvCxnSpPr>
+          <p:cNvPr id="8" name="Connector 7"/>
+          <p:cNvCxnSpPr/>
+          <p:nvPr/>
+        </p:nvCxnSpPr>
+        <p:spPr>
+          <a:xfrm flipV="1">
+            <a:off x="0" y="1224000"/>
+            <a:ext cx="345600" cy="345600"/>
+          </a:xfrm>
+          <a:prstGeom prst="line">
+            <a:avLst/>
+          </a:prstGeom>
+          <a:ln w="3600">
+            <a:solidFill>
+              <a:srgbClr val="FFFFFF"/>
+            </a:solidFill>
+          </a:ln>
+        </p:spPr>
+      </p:cxnSp>
+      <p:cxnSp>
+        <p:nvCxnSpPr>
+          <p:cNvPr id="9" name="Connector 8"/>
+          <p:cNvCxnSpPr/>
+          <p:nvPr/>
+        </p:nvCxnSpPr>
+        <p:spPr>
+          <a:xfrm flipV="1">
+            <a:off x="0" y="1224000"/>
+            <a:ext cx="403200" cy="403200"/>
+          </a:xfrm>
+          <a:prstGeom prst="line">
+            <a:avLst/>
+          </a:prstGeom>
+          <a:ln w="3600">
+            <a:solidFill>
+              <a:srgbClr val="FFFFFF"/>
+            </a:solidFill>
+          </a:ln>
+        </p:spPr>
+      </p:cxnSp>
+      <p:cxnSp>
+        <p:nvCxnSpPr>
+          <p:cNvPr id="10" name="Connector 9"/>
+          <p:cNvCxnSpPr/>
+          <p:nvPr/>
+        </p:nvCxnSpPr>
+        <p:spPr>
+          <a:xfrm flipV="1">
+            <a:off x="0" y="1224000"/>
+            <a:ext cx="460800" cy="460800"/>
+          </a:xfrm>
+          <a:prstGeom prst="line">
+            <a:avLst/>
+          </a:prstGeom>
+          <a:ln w="3600">
+            <a:solidFill>
+              <a:srgbClr val="FFFFFF"/>
+            </a:solidFill>
+          </a:ln>
+        </p:spPr>
+      </p:cxnSp>
+      <p:cxnSp>
+        <p:nvCxnSpPr>
+          <p:cNvPr id="11" name="Connector 10"/>
+          <p:cNvCxnSpPr/>
+          <p:nvPr/>
+        </p:nvCxnSpPr>
+        <p:spPr>
+          <a:xfrm flipV="1">
+            <a:off x="0" y="1224000"/>
+            <a:ext cx="518400" cy="518400"/>
+          </a:xfrm>
+          <a:prstGeom prst="line">
+            <a:avLst/>
+          </a:prstGeom>
+          <a:ln w="3600">
+            <a:solidFill>
+              <a:srgbClr val="FFFFFF"/>
+            </a:solidFill>
+          </a:ln>
+        </p:spPr>
+      </p:cxnSp>
+      <p:cxnSp>
+        <p:nvCxnSpPr>
+          <p:cNvPr id="12" name="Connector 11"/>
+          <p:cNvCxnSpPr/>
+          <p:nvPr/>
+        </p:nvCxnSpPr>
+        <p:spPr>
+          <a:xfrm flipV="1">
+            <a:off x="0" y="1224000"/>
+            <a:ext cx="576000" cy="576000"/>
+          </a:xfrm>
+          <a:prstGeom prst="line">
+            <a:avLst/>
+          </a:prstGeom>
+          <a:ln w="3600">
+            <a:solidFill>
+              <a:srgbClr val="FFFFFF"/>
+            </a:solidFill>
+          </a:ln>
+        </p:spPr>
+      </p:cxnSp>
+      <p:cxnSp>
+        <p:nvCxnSpPr>
+          <p:cNvPr id="13" name="Connector 12"/>
+          <p:cNvCxnSpPr/>
+          <p:nvPr/>
+        </p:nvCxnSpPr>
+        <p:spPr>
+          <a:xfrm flipV="1">
+            <a:off x="57600" y="1224000"/>
+            <a:ext cx="576000" cy="576000"/>
+          </a:xfrm>
+          <a:prstGeom prst="line">
+            <a:avLst/>
+          </a:prstGeom>
+          <a:ln w="3600">
+            <a:solidFill>
+              <a:srgbClr val="FFFFFF"/>
+            </a:solidFill>
+          </a:ln>
+        </p:spPr>
+      </p:cxnSp>
+      <p:cxnSp>
+        <p:nvCxnSpPr>
+          <p:cNvPr id="14" name="Connector 13"/>
+          <p:cNvCxnSpPr/>
+          <p:nvPr/>
+        </p:nvCxnSpPr>
+        <p:spPr>
+          <a:xfrm flipV="1">
+            <a:off x="115200" y="1224000"/>
+            <a:ext cx="576000" cy="576000"/>
+          </a:xfrm>
+          <a:prstGeom prst="line">
+            <a:avLst/>
+          </a:prstGeom>
+          <a:ln w="3600">
+            <a:solidFill>
+              <a:srgbClr val="FFFFFF"/>
+            </a:solidFill>
+          </a:ln>
+        </p:spPr>
+      </p:cxnSp>
+      <p:cxnSp>
+        <p:nvCxnSpPr>
+          <p:cNvPr id="15" name="Connector 14"/>
+          <p:cNvCxnSpPr/>
+          <p:nvPr/>
+        </p:nvCxnSpPr>
+        <p:spPr>
+          <a:xfrm flipV="1">
+            <a:off x="172800" y="1224000"/>
+            <a:ext cx="576000" cy="576000"/>
+          </a:xfrm>
+          <a:prstGeom prst="line">
+            <a:avLst/>
+          </a:prstGeom>
+          <a:ln w="3600">
+            <a:solidFill>
+              <a:srgbClr val="FFFFFF"/>
+            </a:solidFill>
+          </a:ln>
+        </p:spPr>
+      </p:cxnSp>
+      <p:cxnSp>
+        <p:nvCxnSpPr>
+          <p:cNvPr id="16" name="Connector 15"/>
+          <p:cNvCxnSpPr/>
+          <p:nvPr/>
+        </p:nvCxnSpPr>
+        <p:spPr>
+          <a:xfrm flipV="1">
+            <a:off x="230400" y="1224000"/>
+            <a:ext cx="576000" cy="576000"/>
+          </a:xfrm>
+          <a:prstGeom prst="line">
+            <a:avLst/>
+          </a:prstGeom>
+          <a:ln w="3600">
+            <a:solidFill>
+              <a:srgbClr val="FFFFFF"/>
+            </a:solidFill>
+          </a:ln>
+        </p:spPr>
+      </p:cxnSp>
+      <p:cxnSp>
+        <p:nvCxnSpPr>
+          <p:cNvPr id="17" name="Connector 16"/>
+          <p:cNvCxnSpPr/>
+          <p:nvPr/>
+        </p:nvCxnSpPr>
+        <p:spPr>
+          <a:xfrm flipV="1">
+            <a:off x="288000" y="1224000"/>
+            <a:ext cx="576000" cy="576000"/>
+          </a:xfrm>
+          <a:prstGeom prst="line">
+            <a:avLst/>
+          </a:prstGeom>
+          <a:ln w="3600">
+            <a:solidFill>
+              <a:srgbClr val="FFFFFF"/>
+            </a:solidFill>
+          </a:ln>
+        </p:spPr>
+      </p:cxnSp>
+      <p:cxnSp>
+        <p:nvCxnSpPr>
+          <p:cNvPr id="18" name="Connector 17"/>
+          <p:cNvCxnSpPr/>
+          <p:nvPr/>
+        </p:nvCxnSpPr>
+        <p:spPr>
+          <a:xfrm flipV="1">
+            <a:off x="345600" y="1224000"/>
+            <a:ext cx="576000" cy="576000"/>
+          </a:xfrm>
+          <a:prstGeom prst="line">
+            <a:avLst/>
+          </a:prstGeom>
+          <a:ln w="3600">
+            <a:solidFill>
+              <a:srgbClr val="FFFFFF"/>
+            </a:solidFill>
+          </a:ln>
+        </p:spPr>
+      </p:cxnSp>
+      <p:cxnSp>
+        <p:nvCxnSpPr>
+          <p:cNvPr id="19" name="Connector 18"/>
+          <p:cNvCxnSpPr/>
+          <p:nvPr/>
+        </p:nvCxnSpPr>
+        <p:spPr>
+          <a:xfrm flipV="1">
+            <a:off x="403200" y="1224000"/>
+            <a:ext cx="576000" cy="576000"/>
+          </a:xfrm>
+          <a:prstGeom prst="line">
+            <a:avLst/>
+          </a:prstGeom>
+          <a:ln w="3600">
+            <a:solidFill>
+              <a:srgbClr val="FFFFFF"/>
+            </a:solidFill>
+          </a:ln>
+        </p:spPr>
+      </p:cxnSp>
+      <p:cxnSp>
+        <p:nvCxnSpPr>
+          <p:cNvPr id="20" name="Connector 19"/>
+          <p:cNvCxnSpPr/>
+          <p:nvPr/>
+        </p:nvCxnSpPr>
+        <p:spPr>
+          <a:xfrm flipV="1">
+            <a:off x="460800" y="1224000"/>
+            <a:ext cx="576000" cy="576000"/>
+          </a:xfrm>
+          <a:prstGeom prst="line">
+            <a:avLst/>
+          </a:prstGeom>
+          <a:ln w="3600">
+            <a:solidFill>
+              <a:srgbClr val="FFFFFF"/>
+            </a:solidFill>
+          </a:ln>
+        </p:spPr>
+      </p:cxnSp>
+      <p:cxnSp>
+        <p:nvCxnSpPr>
+          <p:cNvPr id="21" name="Connector 20"/>
+          <p:cNvCxnSpPr/>
+          <p:nvPr/>
+        </p:nvCxnSpPr>
+        <p:spPr>
+          <a:xfrm flipV="1">
+            <a:off x="518400" y="1224000"/>
+            <a:ext cx="576000" cy="576000"/>
+          </a:xfrm>
+          <a:prstGeom prst="line">
+            <a:avLst/>
+          </a:prstGeom>
+          <a:ln w="3600">
+            <a:solidFill>
+              <a:srgbClr val="FFFFFF"/>
+            </a:solidFill>
+          </a:ln>
+        </p:spPr>
+      </p:cxnSp>
+      <p:cxnSp>
+        <p:nvCxnSpPr>
+          <p:cNvPr id="22" name="Connector 21"/>
+          <p:cNvCxnSpPr/>
+          <p:nvPr/>
+        </p:nvCxnSpPr>
+        <p:spPr>
+          <a:xfrm flipV="1">
+            <a:off x="576000" y="1224000"/>
+            <a:ext cx="576000" cy="576000"/>
+          </a:xfrm>
+          <a:prstGeom prst="line">
+            <a:avLst/>
+          </a:prstGeom>
+          <a:ln w="3600">
+            <a:solidFill>
+              <a:srgbClr val="FFFFFF"/>
+            </a:solidFill>
+          </a:ln>
+        </p:spPr>
+      </p:cxnSp>
+      <p:cxnSp>
+        <p:nvCxnSpPr>
+          <p:cNvPr id="23" name="Connector 22"/>
+          <p:cNvCxnSpPr/>
+          <p:nvPr/>
+        </p:nvCxnSpPr>
+        <p:spPr>
+          <a:xfrm flipV="1">
+            <a:off x="633600" y="1245600"/>
+            <a:ext cx="554400" cy="554400"/>
+          </a:xfrm>
+          <a:prstGeom prst="line">
+            <a:avLst/>
+          </a:prstGeom>
+          <a:ln w="3600">
+            <a:solidFill>
+              <a:srgbClr val="FFFFFF"/>
+            </a:solidFill>
+          </a:ln>
+        </p:spPr>
+      </p:cxnSp>
+      <p:cxnSp>
+        <p:nvCxnSpPr>
+          <p:cNvPr id="24" name="Connector 23"/>
+          <p:cNvCxnSpPr/>
+          <p:nvPr/>
+        </p:nvCxnSpPr>
+        <p:spPr>
+          <a:xfrm flipV="1">
+            <a:off x="691200" y="1303200"/>
+            <a:ext cx="496800" cy="496800"/>
+          </a:xfrm>
+          <a:prstGeom prst="line">
+            <a:avLst/>
+          </a:prstGeom>
+          <a:ln w="3600">
+            <a:solidFill>
+              <a:srgbClr val="FFFFFF"/>
+            </a:solidFill>
+          </a:ln>
+        </p:spPr>
+      </p:cxnSp>
+      <p:cxnSp>
+        <p:nvCxnSpPr>
+          <p:cNvPr id="25" name="Connector 24"/>
+          <p:cNvCxnSpPr/>
+          <p:nvPr/>
+        </p:nvCxnSpPr>
+        <p:spPr>
+          <a:xfrm flipV="1">
+            <a:off x="748800" y="1360800"/>
+            <a:ext cx="439200" cy="439200"/>
+          </a:xfrm>
+          <a:prstGeom prst="line">
+            <a:avLst/>
+          </a:prstGeom>
+          <a:ln w="3600">
+            <a:solidFill>
+              <a:srgbClr val="FFFFFF"/>
+            </a:solidFill>
+          </a:ln>
+        </p:spPr>
+      </p:cxnSp>
+      <p:cxnSp>
+        <p:nvCxnSpPr>
+          <p:cNvPr id="26" name="Connector 25"/>
+          <p:cNvCxnSpPr/>
+          <p:nvPr/>
+        </p:nvCxnSpPr>
+        <p:spPr>
+          <a:xfrm flipV="1">
+            <a:off x="806400" y="1418400"/>
+            <a:ext cx="381600" cy="381600"/>
+          </a:xfrm>
+          <a:prstGeom prst="line">
+            <a:avLst/>
+          </a:prstGeom>
+          <a:ln w="3600">
+            <a:solidFill>
+              <a:srgbClr val="FFFFFF"/>
+            </a:solidFill>
+          </a:ln>
+        </p:spPr>
+      </p:cxnSp>
+      <p:cxnSp>
+        <p:nvCxnSpPr>
+          <p:cNvPr id="27" name="Connector 26"/>
+          <p:cNvCxnSpPr/>
+          <p:nvPr/>
+        </p:nvCxnSpPr>
+        <p:spPr>
+          <a:xfrm flipV="1">
+            <a:off x="864000" y="1476000"/>
+            <a:ext cx="324000" cy="324000"/>
+          </a:xfrm>
+          <a:prstGeom prst="line">
+            <a:avLst/>
+          </a:prstGeom>
+          <a:ln w="3600">
+            <a:solidFill>
+              <a:srgbClr val="FFFFFF"/>
+            </a:solidFill>
+          </a:ln>
+        </p:spPr>
+      </p:cxnSp>
+      <p:cxnSp>
+        <p:nvCxnSpPr>
+          <p:cNvPr id="28" name="Connector 27"/>
+          <p:cNvCxnSpPr/>
+          <p:nvPr/>
+        </p:nvCxnSpPr>
+        <p:spPr>
+          <a:xfrm flipV="1">
+            <a:off x="921600" y="1533600"/>
+            <a:ext cx="266400" cy="266400"/>
+          </a:xfrm>
+          <a:prstGeom prst="line">
+            <a:avLst/>
+          </a:prstGeom>
+          <a:ln w="3600">
+            <a:solidFill>
+              <a:srgbClr val="FFFFFF"/>
+            </a:solidFill>
+          </a:ln>
+        </p:spPr>
+      </p:cxnSp>
+      <p:cxnSp>
+        <p:nvCxnSpPr>
+          <p:cNvPr id="29" name="Connector 28"/>
+          <p:cNvCxnSpPr/>
+          <p:nvPr/>
+        </p:nvCxnSpPr>
+        <p:spPr>
+          <a:xfrm flipV="1">
+            <a:off x="979200" y="1591200"/>
+            <a:ext cx="208800" cy="208800"/>
+          </a:xfrm>
+          <a:prstGeom prst="line">
+            <a:avLst/>
+          </a:prstGeom>
+          <a:ln w="3600">
+            <a:solidFill>
+              <a:srgbClr val="FFFFFF"/>
+            </a:solidFill>
+          </a:ln>
+        </p:spPr>
+      </p:cxnSp>
+      <p:cxnSp>
+        <p:nvCxnSpPr>
+          <p:cNvPr id="30" name="Connector 29"/>
+          <p:cNvCxnSpPr/>
+          <p:nvPr/>
+        </p:nvCxnSpPr>
+        <p:spPr>
+          <a:xfrm flipV="1">
+            <a:off x="1036800" y="1648800"/>
+            <a:ext cx="151200" cy="151200"/>
+          </a:xfrm>
+          <a:prstGeom prst="line">
+            <a:avLst/>
+          </a:prstGeom>
+          <a:ln w="3600">
+            <a:solidFill>
+              <a:srgbClr val="FFFFFF"/>
+            </a:solidFill>
+          </a:ln>
+        </p:spPr>
+      </p:cxnSp>
+      <p:cxnSp>
+        <p:nvCxnSpPr>
+          <p:cNvPr id="31" name="Connector 30"/>
+          <p:cNvCxnSpPr/>
+          <p:nvPr/>
+        </p:nvCxnSpPr>
+        <p:spPr>
+          <a:xfrm flipV="1">
+            <a:off x="1094400" y="1706400"/>
+            <a:ext cx="93600" cy="93600"/>
+          </a:xfrm>
+          <a:prstGeom prst="line">
+            <a:avLst/>
+          </a:prstGeom>
+          <a:ln w="3600">
+            <a:solidFill>
+              <a:srgbClr val="FFFFFF"/>
+            </a:solidFill>
+          </a:ln>
+        </p:spPr>
+      </p:cxnSp>
+      <p:cxnSp>
+        <p:nvCxnSpPr>
+          <p:cNvPr id="32" name="Connector 31"/>
+          <p:cNvCxnSpPr/>
+          <p:nvPr/>
+        </p:nvCxnSpPr>
+        <p:spPr>
+          <a:xfrm flipV="1">
+            <a:off x="1152000" y="1764000"/>
+            <a:ext cx="36000" cy="36000"/>
+          </a:xfrm>
+          <a:prstGeom prst="line">
+            <a:avLst/>
+          </a:prstGeom>
+          <a:ln w="3600">
+            <a:solidFill>
+              <a:srgbClr val="FFFFFF"/>
+            </a:solidFill>
+          </a:ln>
+        </p:spPr>
+      </p:cxnSp>
+      <p:sp>
+        <p:nvSpPr>
+          <p:cNvPr id="33" name="Oval 32"/>
+          <p:cNvSpPr/>
+          <p:nvPr/>
+        </p:nvSpPr>
+        <p:spPr>
+          <a:xfrm>
+            <a:off x="216000" y="252000"/>
+            <a:ext cx="288000" cy="288000"/>
+          </a:xfrm>
+          <a:prstGeom prst="ellipse">
+            <a:avLst/>
+          </a:prstGeom>
+          <a:noFill/>
+          <a:ln w="5760">
+            <a:solidFill>
+              <a:srgbClr val="FFFFFF"/>
+            </a:solidFill>
+          </a:ln>
+        </p:spPr>
         <p:txBody>
           <a:bodyPr rtlCol="0" anchor="ctr"/>
           <a:lstStyle/>
@@ -3743,14 +4444,14 @@
       </p:sp>
       <p:sp>
         <p:nvSpPr>
-          <p:cNvPr id="4" name="텍스트"/>
+          <p:cNvPr id="34" name="텍스트"/>
           <p:cNvSpPr txBox="1"/>
           <p:nvPr/>
         </p:nvSpPr>
         <p:spPr>
           <a:xfrm>
-            <a:off x="2304000" y="684000"/>
-            <a:ext cx="720000" cy="432000"/>
+            <a:off x="216000" y="252000"/>
+            <a:ext cx="288000" cy="288000"/>
           </a:xfrm>
           <a:prstGeom prst="rect">
             <a:avLst/>
@@ -3765,11 +4466,11 @@
           <a:p>
             <a:pPr algn="ctr">
               <a:lnSpc>
-                <a:spcPts val="4350"/>
+                <a:spcPts val="2030"/>
               </a:lnSpc>
             </a:pPr>
             <a:r>
-              <a:rPr sz="3000" b="1">
+              <a:rPr sz="1400" b="1">
                 <a:solidFill>
                   <a:srgbClr val="FFFFFF"/>
                 </a:solidFill>
@@ -3783,14 +4484,14 @@
       </p:sp>
       <p:sp>
         <p:nvSpPr>
-          <p:cNvPr id="5" name="텍스트"/>
+          <p:cNvPr id="35" name="텍스트"/>
           <p:cNvSpPr txBox="1"/>
           <p:nvPr/>
         </p:nvSpPr>
         <p:spPr>
           <a:xfrm>
-            <a:off x="252000" y="540000"/>
-            <a:ext cx="1620000" cy="720000"/>
+            <a:off x="216000" y="1440000"/>
+            <a:ext cx="828000" cy="142876"/>
           </a:xfrm>
           <a:prstGeom prst="rect">
             <a:avLst/>
@@ -3805,49 +4506,154 @@
           <a:p>
             <a:pPr algn="l">
               <a:lnSpc>
-                <a:spcPts val="1739"/>
+                <a:spcPts val="1087"/>
               </a:lnSpc>
             </a:pPr>
             <a:r>
-              <a:rPr sz="1200" b="1">
+              <a:rPr sz="750" b="1" spc="100">
                 <a:solidFill>
                   <a:srgbClr val="FFFFFF"/>
                 </a:solidFill>
                 <a:latin typeface="맑은 고딕"/>
                 <a:ea typeface="맑은 고딕"/>
               </a:rPr>
-              <a:t>건강은 꾸준한</a:t>
-            </a:r>
-          </a:p>
+              <a:t>진료 · 상담</a:t>
+            </a:r>
+          </a:p>
+        </p:txBody>
+      </p:sp>
+      <p:sp>
+        <p:nvSpPr>
+          <p:cNvPr id="36" name="텍스트"/>
+          <p:cNvSpPr txBox="1"/>
+          <p:nvPr/>
+        </p:nvSpPr>
+        <p:spPr>
+          <a:xfrm>
+            <a:off x="1440000" y="223200"/>
+            <a:ext cx="1080000" cy="99061"/>
+          </a:xfrm>
+          <a:prstGeom prst="rect">
+            <a:avLst/>
+          </a:prstGeom>
+          <a:noFill/>
+        </p:spPr>
+        <p:txBody>
+          <a:bodyPr wrap="square" lIns="0" rIns="0" tIns="0" bIns="0" anchor="t">
+            <a:spAutoFit/>
+          </a:bodyPr>
+          <a:lstStyle/>
           <a:p>
             <a:pPr algn="l">
               <a:lnSpc>
-                <a:spcPts val="1739"/>
+                <a:spcPts val="754"/>
               </a:lnSpc>
             </a:pPr>
             <a:r>
-              <a:rPr sz="1200" b="1">
+              <a:rPr sz="520" b="1" spc="240">
+                <a:solidFill>
+                  <a:srgbClr val="A3A9B5"/>
+                </a:solidFill>
+                <a:latin typeface="맑은 고딕"/>
+                <a:ea typeface="맑은 고딕"/>
+              </a:rPr>
+              <a:t>진료 · 상담</a:t>
+            </a:r>
+          </a:p>
+        </p:txBody>
+      </p:sp>
+      <p:cxnSp>
+        <p:nvCxnSpPr>
+          <p:cNvPr id="37" name="Connector 36"/>
+          <p:cNvCxnSpPr/>
+          <p:nvPr/>
+        </p:nvCxnSpPr>
+        <p:spPr>
+          <a:xfrm>
+            <a:off x="1440000" y="360000"/>
+            <a:ext cx="1548000" cy="0"/>
+          </a:xfrm>
+          <a:prstGeom prst="line">
+            <a:avLst/>
+          </a:prstGeom>
+          <a:ln w="3600">
+            <a:solidFill>
+              <a:srgbClr val="2A2F38"/>
+            </a:solidFill>
+          </a:ln>
+        </p:spPr>
+      </p:cxnSp>
+      <p:sp>
+        <p:nvSpPr>
+          <p:cNvPr id="38" name="텍스트"/>
+          <p:cNvSpPr txBox="1"/>
+          <p:nvPr/>
+        </p:nvSpPr>
+        <p:spPr>
+          <a:xfrm>
+            <a:off x="1440000" y="403200"/>
+            <a:ext cx="1296000" cy="133351"/>
+          </a:xfrm>
+          <a:prstGeom prst="rect">
+            <a:avLst/>
+          </a:prstGeom>
+          <a:noFill/>
+        </p:spPr>
+        <p:txBody>
+          <a:bodyPr wrap="square" lIns="0" rIns="0" tIns="0" bIns="0" anchor="t">
+            <a:spAutoFit/>
+          </a:bodyPr>
+          <a:lstStyle/>
+          <a:p>
+            <a:pPr algn="l">
+              <a:lnSpc>
+                <a:spcPts val="1015"/>
+              </a:lnSpc>
+            </a:pPr>
+            <a:r>
+              <a:rPr sz="700" b="0">
                 <a:solidFill>
                   <a:srgbClr val="FFFFFF"/>
                 </a:solidFill>
                 <a:latin typeface="맑은 고딕"/>
                 <a:ea typeface="맑은 고딕"/>
               </a:rPr>
-              <a:t>관심에서 시작됩니다</a:t>
-            </a:r>
-          </a:p>
-        </p:txBody>
-      </p:sp>
-      <p:sp>
-        <p:nvSpPr>
-          <p:cNvPr id="6" name="텍스트"/>
+              <a:t>예방 접종</a:t>
+            </a:r>
+          </a:p>
+        </p:txBody>
+      </p:sp>
+      <p:cxnSp>
+        <p:nvCxnSpPr>
+          <p:cNvPr id="39" name="Connector 38"/>
+          <p:cNvCxnSpPr/>
+          <p:nvPr/>
+        </p:nvCxnSpPr>
+        <p:spPr>
+          <a:xfrm>
+            <a:off x="1440000" y="561600"/>
+            <a:ext cx="1548000" cy="0"/>
+          </a:xfrm>
+          <a:prstGeom prst="line">
+            <a:avLst/>
+          </a:prstGeom>
+          <a:ln w="3600">
+            <a:solidFill>
+              <a:srgbClr val="2A2F38"/>
+            </a:solidFill>
+          </a:ln>
+        </p:spPr>
+      </p:cxnSp>
+      <p:sp>
+        <p:nvSpPr>
+          <p:cNvPr id="40" name="텍스트"/>
           <p:cNvSpPr txBox="1"/>
           <p:nvPr/>
         </p:nvSpPr>
         <p:spPr>
           <a:xfrm>
-            <a:off x="252000" y="1512000"/>
-            <a:ext cx="1584000" cy="123826"/>
+            <a:off x="1440000" y="604800"/>
+            <a:ext cx="1296000" cy="133351"/>
           </a:xfrm>
           <a:prstGeom prst="rect">
             <a:avLst/>
@@ -3862,18 +4668,201 @@
           <a:p>
             <a:pPr algn="l">
               <a:lnSpc>
-                <a:spcPts val="942"/>
+                <a:spcPts val="1015"/>
               </a:lnSpc>
             </a:pPr>
             <a:r>
-              <a:rPr sz="650" b="1" spc="200">
+              <a:rPr sz="700" b="0">
+                <a:solidFill>
+                  <a:srgbClr val="FFFFFF"/>
+                </a:solidFill>
+                <a:latin typeface="맑은 고딕"/>
+                <a:ea typeface="맑은 고딕"/>
+              </a:rPr>
+              <a:t>방문 요양</a:t>
+            </a:r>
+          </a:p>
+        </p:txBody>
+      </p:sp>
+      <p:cxnSp>
+        <p:nvCxnSpPr>
+          <p:cNvPr id="41" name="Connector 40"/>
+          <p:cNvCxnSpPr/>
+          <p:nvPr/>
+        </p:nvCxnSpPr>
+        <p:spPr>
+          <a:xfrm>
+            <a:off x="1440000" y="763200"/>
+            <a:ext cx="1548000" cy="0"/>
+          </a:xfrm>
+          <a:prstGeom prst="line">
+            <a:avLst/>
+          </a:prstGeom>
+          <a:ln w="3600">
+            <a:solidFill>
+              <a:srgbClr val="2A2F38"/>
+            </a:solidFill>
+          </a:ln>
+        </p:spPr>
+      </p:cxnSp>
+      <p:sp>
+        <p:nvSpPr>
+          <p:cNvPr id="42" name="텍스트"/>
+          <p:cNvSpPr txBox="1"/>
+          <p:nvPr/>
+        </p:nvSpPr>
+        <p:spPr>
+          <a:xfrm>
+            <a:off x="1440000" y="806400"/>
+            <a:ext cx="1296000" cy="133351"/>
+          </a:xfrm>
+          <a:prstGeom prst="rect">
+            <a:avLst/>
+          </a:prstGeom>
+          <a:noFill/>
+        </p:spPr>
+        <p:txBody>
+          <a:bodyPr wrap="square" lIns="0" rIns="0" tIns="0" bIns="0" anchor="t">
+            <a:spAutoFit/>
+          </a:bodyPr>
+          <a:lstStyle/>
+          <a:p>
+            <a:pPr algn="l">
+              <a:lnSpc>
+                <a:spcPts val="1015"/>
+              </a:lnSpc>
+            </a:pPr>
+            <a:r>
+              <a:rPr sz="700" b="0">
+                <a:solidFill>
+                  <a:srgbClr val="FFFFFF"/>
+                </a:solidFill>
+                <a:latin typeface="맑은 고딕"/>
+                <a:ea typeface="맑은 고딕"/>
+              </a:rPr>
+              <a:t>물리 치료</a:t>
+            </a:r>
+          </a:p>
+        </p:txBody>
+      </p:sp>
+      <p:cxnSp>
+        <p:nvCxnSpPr>
+          <p:cNvPr id="43" name="Connector 42"/>
+          <p:cNvCxnSpPr/>
+          <p:nvPr/>
+        </p:nvCxnSpPr>
+        <p:spPr>
+          <a:xfrm>
+            <a:off x="1440000" y="964800"/>
+            <a:ext cx="1548000" cy="0"/>
+          </a:xfrm>
+          <a:prstGeom prst="line">
+            <a:avLst/>
+          </a:prstGeom>
+          <a:ln w="3600">
+            <a:solidFill>
+              <a:srgbClr val="2A2F38"/>
+            </a:solidFill>
+          </a:ln>
+        </p:spPr>
+      </p:cxnSp>
+      <p:sp>
+        <p:nvSpPr>
+          <p:cNvPr id="44" name="텍스트"/>
+          <p:cNvSpPr txBox="1"/>
+          <p:nvPr/>
+        </p:nvSpPr>
+        <p:spPr>
+          <a:xfrm>
+            <a:off x="1440000" y="1008000"/>
+            <a:ext cx="1296000" cy="133351"/>
+          </a:xfrm>
+          <a:prstGeom prst="rect">
+            <a:avLst/>
+          </a:prstGeom>
+          <a:noFill/>
+        </p:spPr>
+        <p:txBody>
+          <a:bodyPr wrap="square" lIns="0" rIns="0" tIns="0" bIns="0" anchor="t">
+            <a:spAutoFit/>
+          </a:bodyPr>
+          <a:lstStyle/>
+          <a:p>
+            <a:pPr algn="l">
+              <a:lnSpc>
+                <a:spcPts val="1015"/>
+              </a:lnSpc>
+            </a:pPr>
+            <a:r>
+              <a:rPr sz="700" b="0">
+                <a:solidFill>
+                  <a:srgbClr val="FFFFFF"/>
+                </a:solidFill>
+                <a:latin typeface="맑은 고딕"/>
+                <a:ea typeface="맑은 고딕"/>
+              </a:rPr>
+              <a:t>예약 문의</a:t>
+            </a:r>
+          </a:p>
+        </p:txBody>
+      </p:sp>
+      <p:cxnSp>
+        <p:nvCxnSpPr>
+          <p:cNvPr id="45" name="Connector 44"/>
+          <p:cNvCxnSpPr/>
+          <p:nvPr/>
+        </p:nvCxnSpPr>
+        <p:spPr>
+          <a:xfrm>
+            <a:off x="1440000" y="1166400"/>
+            <a:ext cx="1548000" cy="0"/>
+          </a:xfrm>
+          <a:prstGeom prst="line">
+            <a:avLst/>
+          </a:prstGeom>
+          <a:ln w="3600">
+            <a:solidFill>
+              <a:srgbClr val="2A2F38"/>
+            </a:solidFill>
+          </a:ln>
+        </p:spPr>
+      </p:cxnSp>
+      <p:sp>
+        <p:nvSpPr>
+          <p:cNvPr id="46" name="텍스트"/>
+          <p:cNvSpPr txBox="1"/>
+          <p:nvPr/>
+        </p:nvSpPr>
+        <p:spPr>
+          <a:xfrm>
+            <a:off x="1440000" y="1569600"/>
+            <a:ext cx="1548000" cy="114301"/>
+          </a:xfrm>
+          <a:prstGeom prst="rect">
+            <a:avLst/>
+          </a:prstGeom>
+          <a:noFill/>
+        </p:spPr>
+        <p:txBody>
+          <a:bodyPr wrap="square" lIns="0" rIns="0" tIns="0" bIns="0" anchor="t">
+            <a:spAutoFit/>
+          </a:bodyPr>
+          <a:lstStyle/>
+          <a:p>
+            <a:pPr algn="l">
+              <a:lnSpc>
+                <a:spcPts val="869"/>
+              </a:lnSpc>
+            </a:pPr>
+            <a:r>
+              <a:rPr sz="600" b="0">
                 <a:solidFill>
                   <a:srgbClr val="A3A9B5"/>
                 </a:solidFill>
                 <a:latin typeface="맑은 고딕"/>
                 <a:ea typeface="맑은 고딕"/>
               </a:rPr>
-              <a:t>의원 · 약국 이름</a:t>
+              <a:t>토 09:00 – 13:00   |   @채널아이디</a:t>
             </a:r>
           </a:p>
         </p:txBody>
